--- a/build/out/מצפן זכויות איבה - מצגת לעובדים.pptx
+++ b/build/out/מצפן זכויות איבה - מצגת לעובדים.pptx
@@ -1662,7 +1662,7 @@
           <a:p>
             <a:r>
               <a:rPr lang="en-US" dirty="0"/>
-              <a:t/>
+              <a:t>זו הרמה הראשונה. כל מה שמופיע כאן נמצא בצילום המסך שעל השקף. היתרה למימוש והסטטוסים המלאים נמצאים רק אחרי לחיצה על "פרטים נוספים".</a:t>
             </a:r>
             <a:endParaRPr lang="en-US" dirty="0"/>
           </a:p>
@@ -1750,7 +1750,7 @@
           <a:p>
             <a:r>
               <a:rPr lang="en-US" dirty="0"/>
-              <a:t>הנימוק שנבחר באישור ההחלטה הוא טקסט שהמבוטח יקרא. שווה לומר את זה במפורש.</a:t>
+              <a:t>הנימוק שנבחר באישור ההחלטה הוא הטקסט שהמבוטח קורא. שווה לומר את זה במפורש.</a:t>
             </a:r>
             <a:endParaRPr lang="en-US" dirty="0"/>
           </a:p>
@@ -1926,7 +1926,7 @@
           <a:p>
             <a:r>
               <a:rPr lang="en-US" dirty="0"/>
-              <a:t/>
+              <a:t>שני ההסברים על השקף הם הנוסח שהמצפן עצמו מציג למבוטח.</a:t>
             </a:r>
             <a:endParaRPr lang="en-US" dirty="0"/>
           </a:p>
@@ -2578,7 +2578,7 @@
                 <a:ea typeface="Arial" pitchFamily="34" charset="-122"/>
                 <a:cs typeface="Arial" pitchFamily="34" charset="-120"/>
               </a:rPr>
-              <a:t>רק בתכנית פעילה — וזה מה שהוא מקבל בסוף</a:t>
+              <a:t>שני מקומות שמהם אפשר להגיש</a:t>
             </a:r>
             <a:endParaRPr lang="en-US" sz="1550" dirty="0"/>
           </a:p>
@@ -2631,7 +2631,217 @@
         </p:nvSpPr>
         <p:spPr>
           <a:xfrm>
-            <a:off x="5769864" y="1737360"/>
+            <a:off x="6368796" y="1645920"/>
+            <a:ext cx="5134356" cy="1371600"/>
+          </a:xfrm>
+          <a:prstGeom prst="roundRect">
+            <a:avLst>
+              <a:gd name="adj" fmla="val 8000"/>
+            </a:avLst>
+          </a:prstGeom>
+          <a:solidFill>
+            <a:srgbClr val="FFFFFF"/>
+          </a:solidFill>
+          <a:ln w="20320">
+            <a:solidFill>
+              <a:srgbClr val="1F6E43"/>
+            </a:solidFill>
+            <a:prstDash val="solid"/>
+          </a:ln>
+        </p:spPr>
+      </p:sp>
+      <p:sp>
+        <p:nvSpPr>
+          <p:cNvPr id="7" name="Text 4"/>
+          <p:cNvSpPr txBox="1"/>
+          <p:nvPr/>
+        </p:nvSpPr>
+        <p:spPr>
+          <a:xfrm>
+            <a:off x="6661404" y="1810512"/>
+            <a:ext cx="4549140" cy="411480"/>
+          </a:xfrm>
+          <a:prstGeom prst="rect">
+            <a:avLst/>
+          </a:prstGeom>
+          <a:noFill/>
+          <a:ln/>
+        </p:spPr>
+        <p:txBody>
+          <a:bodyPr wrap="square" rtlCol="0" anchor="ctr"/>
+          <a:lstStyle/>
+          <a:p>
+            <a:pPr rtl="1" algn="r" indent="0" marL="0">
+              <a:buNone/>
+            </a:pPr>
+            <a:r>
+              <a:rPr lang="en-US" sz="2000" b="1" dirty="0">
+                <a:solidFill>
+                  <a:srgbClr val="1F6E43"/>
+                </a:solidFill>
+                <a:latin typeface="Arial" pitchFamily="34" charset="0"/>
+                <a:ea typeface="Arial" pitchFamily="34" charset="-122"/>
+                <a:cs typeface="Arial" pitchFamily="34" charset="-120"/>
+              </a:rPr>
+              <a:t>מתכנית פעילה</a:t>
+            </a:r>
+            <a:endParaRPr lang="en-US" sz="2000" dirty="0"/>
+          </a:p>
+        </p:txBody>
+      </p:sp>
+      <p:sp>
+        <p:nvSpPr>
+          <p:cNvPr id="8" name="Text 5"/>
+          <p:cNvSpPr txBox="1"/>
+          <p:nvPr/>
+        </p:nvSpPr>
+        <p:spPr>
+          <a:xfrm>
+            <a:off x="6661404" y="2240280"/>
+            <a:ext cx="4549140" cy="640080"/>
+          </a:xfrm>
+          <a:prstGeom prst="rect">
+            <a:avLst/>
+          </a:prstGeom>
+          <a:noFill/>
+          <a:ln/>
+        </p:spPr>
+        <p:txBody>
+          <a:bodyPr wrap="square" rtlCol="0" anchor="t"/>
+          <a:lstStyle/>
+          <a:p>
+            <a:pPr rtl="1" algn="r" indent="0" marL="0">
+              <a:buNone/>
+            </a:pPr>
+            <a:r>
+              <a:rPr lang="en-US" sz="1550" dirty="0">
+                <a:solidFill>
+                  <a:srgbClr val="1E2C24"/>
+                </a:solidFill>
+                <a:latin typeface="Arial" pitchFamily="34" charset="0"/>
+                <a:ea typeface="Arial" pitchFamily="34" charset="-122"/>
+                <a:cs typeface="Arial" pitchFamily="34" charset="-120"/>
+              </a:rPr>
+              <a:t>בדף ההטבה, בכפתור "להגשת חשבונית / קבלה חדשה".</a:t>
+            </a:r>
+            <a:endParaRPr lang="en-US" sz="1550" dirty="0"/>
+          </a:p>
+        </p:txBody>
+      </p:sp>
+      <p:sp>
+        <p:nvSpPr>
+          <p:cNvPr id="9" name="Shape 6"/>
+          <p:cNvSpPr/>
+          <p:nvPr/>
+        </p:nvSpPr>
+        <p:spPr>
+          <a:xfrm>
+            <a:off x="685800" y="1645920"/>
+            <a:ext cx="5134356" cy="1371600"/>
+          </a:xfrm>
+          <a:prstGeom prst="roundRect">
+            <a:avLst>
+              <a:gd name="adj" fmla="val 8000"/>
+            </a:avLst>
+          </a:prstGeom>
+          <a:solidFill>
+            <a:srgbClr val="FFFFFF"/>
+          </a:solidFill>
+          <a:ln w="20320">
+            <a:solidFill>
+              <a:srgbClr val="5E3A94"/>
+            </a:solidFill>
+            <a:prstDash val="solid"/>
+          </a:ln>
+        </p:spPr>
+      </p:sp>
+      <p:sp>
+        <p:nvSpPr>
+          <p:cNvPr id="10" name="Text 7"/>
+          <p:cNvSpPr txBox="1"/>
+          <p:nvPr/>
+        </p:nvSpPr>
+        <p:spPr>
+          <a:xfrm>
+            <a:off x="978408" y="1810512"/>
+            <a:ext cx="4549140" cy="411480"/>
+          </a:xfrm>
+          <a:prstGeom prst="rect">
+            <a:avLst/>
+          </a:prstGeom>
+          <a:noFill/>
+          <a:ln/>
+        </p:spPr>
+        <p:txBody>
+          <a:bodyPr wrap="square" rtlCol="0" anchor="ctr"/>
+          <a:lstStyle/>
+          <a:p>
+            <a:pPr rtl="1" algn="r" indent="0" marL="0">
+              <a:buNone/>
+            </a:pPr>
+            <a:r>
+              <a:rPr lang="en-US" sz="2000" b="1" dirty="0">
+                <a:solidFill>
+                  <a:srgbClr val="5E3A94"/>
+                </a:solidFill>
+                <a:latin typeface="Arial" pitchFamily="34" charset="0"/>
+                <a:ea typeface="Arial" pitchFamily="34" charset="-122"/>
+                <a:cs typeface="Arial" pitchFamily="34" charset="-120"/>
+              </a:rPr>
+              <a:t>מהטבה פוטנציאלית</a:t>
+            </a:r>
+            <a:endParaRPr lang="en-US" sz="2000" dirty="0"/>
+          </a:p>
+        </p:txBody>
+      </p:sp>
+      <p:sp>
+        <p:nvSpPr>
+          <p:cNvPr id="11" name="Text 8"/>
+          <p:cNvSpPr txBox="1"/>
+          <p:nvPr/>
+        </p:nvSpPr>
+        <p:spPr>
+          <a:xfrm>
+            <a:off x="978408" y="2240280"/>
+            <a:ext cx="4549140" cy="640080"/>
+          </a:xfrm>
+          <a:prstGeom prst="rect">
+            <a:avLst/>
+          </a:prstGeom>
+          <a:noFill/>
+          <a:ln/>
+        </p:spPr>
+        <p:txBody>
+          <a:bodyPr wrap="square" rtlCol="0" anchor="t"/>
+          <a:lstStyle/>
+          <a:p>
+            <a:pPr rtl="1" algn="r" indent="0" marL="0">
+              <a:buNone/>
+            </a:pPr>
+            <a:r>
+              <a:rPr lang="en-US" sz="1550" dirty="0">
+                <a:solidFill>
+                  <a:srgbClr val="1E2C24"/>
+                </a:solidFill>
+                <a:latin typeface="Arial" pitchFamily="34" charset="0"/>
+                <a:ea typeface="Arial" pitchFamily="34" charset="-122"/>
+                <a:cs typeface="Arial" pitchFamily="34" charset="-120"/>
+              </a:rPr>
+              <a:t>כאשר כפתור הפעולה שם הוא "הגשת בקשה".</a:t>
+            </a:r>
+            <a:endParaRPr lang="en-US" sz="1550" dirty="0"/>
+          </a:p>
+        </p:txBody>
+      </p:sp>
+      <p:sp>
+        <p:nvSpPr>
+          <p:cNvPr id="12" name="Shape 9"/>
+          <p:cNvSpPr/>
+          <p:nvPr/>
+        </p:nvSpPr>
+        <p:spPr>
+          <a:xfrm>
+            <a:off x="5495544" y="3429000"/>
             <a:ext cx="402336" cy="402336"/>
           </a:xfrm>
           <a:prstGeom prst="ellipse">
@@ -2650,13 +2860,13 @@
       </p:sp>
       <p:sp>
         <p:nvSpPr>
-          <p:cNvPr id="7" name="Text 4"/>
-          <p:cNvSpPr txBox="1"/>
-          <p:nvPr/>
-        </p:nvSpPr>
-        <p:spPr>
-          <a:xfrm>
-            <a:off x="5769864" y="1737360"/>
+          <p:cNvPr id="13" name="Text 10"/>
+          <p:cNvSpPr txBox="1"/>
+          <p:nvPr/>
+        </p:nvSpPr>
+        <p:spPr>
+          <a:xfrm>
+            <a:off x="5495544" y="3429000"/>
             <a:ext cx="402336" cy="402336"/>
           </a:xfrm>
           <a:prstGeom prst="rect">
@@ -2689,14 +2899,14 @@
       </p:sp>
       <p:sp>
         <p:nvSpPr>
-          <p:cNvPr id="8" name="Text 5"/>
-          <p:cNvSpPr txBox="1"/>
-          <p:nvPr/>
-        </p:nvSpPr>
-        <p:spPr>
-          <a:xfrm>
-            <a:off x="685800" y="1709928"/>
-            <a:ext cx="4937760" cy="731520"/>
+          <p:cNvPr id="14" name="Text 11"/>
+          <p:cNvSpPr txBox="1"/>
+          <p:nvPr/>
+        </p:nvSpPr>
+        <p:spPr>
+          <a:xfrm>
+            <a:off x="685800" y="3401568"/>
+            <a:ext cx="4663440" cy="685800"/>
           </a:xfrm>
           <a:prstGeom prst="rect">
             <a:avLst/>
@@ -2720,7 +2930,7 @@
                 <a:ea typeface="Arial" pitchFamily="34" charset="-122"/>
                 <a:cs typeface="Arial" pitchFamily="34" charset="-120"/>
               </a:rPr>
-              <a:t>בתכנית פעילה, לחיצה על "להגשת חשבונית / קבלה חדשה".</a:t>
+              <a:t>נפתח טופס מקוון עם פרטיו, כולל היתרה למימוש.</a:t>
             </a:r>
             <a:endParaRPr lang="en-US" sz="1650" dirty="0"/>
           </a:p>
@@ -2728,13 +2938,13 @@
       </p:sp>
       <p:sp>
         <p:nvSpPr>
-          <p:cNvPr id="9" name="Shape 6"/>
+          <p:cNvPr id="15" name="Shape 12"/>
           <p:cNvSpPr/>
           <p:nvPr/>
         </p:nvSpPr>
         <p:spPr>
           <a:xfrm>
-            <a:off x="5769864" y="2606040"/>
+            <a:off x="5495544" y="4206240"/>
             <a:ext cx="402336" cy="402336"/>
           </a:xfrm>
           <a:prstGeom prst="ellipse">
@@ -2753,13 +2963,13 @@
       </p:sp>
       <p:sp>
         <p:nvSpPr>
-          <p:cNvPr id="10" name="Text 7"/>
-          <p:cNvSpPr txBox="1"/>
-          <p:nvPr/>
-        </p:nvSpPr>
-        <p:spPr>
-          <a:xfrm>
-            <a:off x="5769864" y="2606040"/>
+          <p:cNvPr id="16" name="Text 13"/>
+          <p:cNvSpPr txBox="1"/>
+          <p:nvPr/>
+        </p:nvSpPr>
+        <p:spPr>
+          <a:xfrm>
+            <a:off x="5495544" y="4206240"/>
             <a:ext cx="402336" cy="402336"/>
           </a:xfrm>
           <a:prstGeom prst="rect">
@@ -2792,14 +3002,14 @@
       </p:sp>
       <p:sp>
         <p:nvSpPr>
-          <p:cNvPr id="11" name="Text 8"/>
-          <p:cNvSpPr txBox="1"/>
-          <p:nvPr/>
-        </p:nvSpPr>
-        <p:spPr>
-          <a:xfrm>
-            <a:off x="685800" y="2578608"/>
-            <a:ext cx="4937760" cy="731520"/>
+          <p:cNvPr id="17" name="Text 14"/>
+          <p:cNvSpPr txBox="1"/>
+          <p:nvPr/>
+        </p:nvSpPr>
+        <p:spPr>
+          <a:xfrm>
+            <a:off x="685800" y="4178808"/>
+            <a:ext cx="4663440" cy="685800"/>
           </a:xfrm>
           <a:prstGeom prst="rect">
             <a:avLst/>
@@ -2823,7 +3033,7 @@
                 <a:ea typeface="Arial" pitchFamily="34" charset="-122"/>
                 <a:cs typeface="Arial" pitchFamily="34" charset="-120"/>
               </a:rPr>
-              <a:t>נפתח טופס מקוון עם פרטיו, כולל היתרה למימוש.</a:t>
+              <a:t>הוא מצרף את המסמכים הרלוונטיים לאותה הטבה.</a:t>
             </a:r>
             <a:endParaRPr lang="en-US" sz="1650" dirty="0"/>
           </a:p>
@@ -2831,116 +3041,13 @@
       </p:sp>
       <p:sp>
         <p:nvSpPr>
-          <p:cNvPr id="12" name="Shape 9"/>
+          <p:cNvPr id="18" name="Shape 15"/>
           <p:cNvSpPr/>
           <p:nvPr/>
         </p:nvSpPr>
         <p:spPr>
           <a:xfrm>
-            <a:off x="5769864" y="3474720"/>
-            <a:ext cx="402336" cy="402336"/>
-          </a:xfrm>
-          <a:prstGeom prst="ellipse">
-            <a:avLst/>
-          </a:prstGeom>
-          <a:solidFill>
-            <a:srgbClr val="14477E"/>
-          </a:solidFill>
-          <a:ln w="25400">
-            <a:solidFill>
-              <a:srgbClr val="FFFFFF"/>
-            </a:solidFill>
-            <a:prstDash val="solid"/>
-          </a:ln>
-        </p:spPr>
-      </p:sp>
-      <p:sp>
-        <p:nvSpPr>
-          <p:cNvPr id="13" name="Text 10"/>
-          <p:cNvSpPr txBox="1"/>
-          <p:nvPr/>
-        </p:nvSpPr>
-        <p:spPr>
-          <a:xfrm>
-            <a:off x="5769864" y="3474720"/>
-            <a:ext cx="402336" cy="402336"/>
-          </a:xfrm>
-          <a:prstGeom prst="rect">
-            <a:avLst/>
-          </a:prstGeom>
-          <a:noFill/>
-          <a:ln/>
-        </p:spPr>
-        <p:txBody>
-          <a:bodyPr wrap="square" lIns="0" tIns="0" rIns="0" bIns="0" rtlCol="0" anchor="ctr"/>
-          <a:lstStyle/>
-          <a:p>
-            <a:pPr rtl="1" algn="ctr" indent="0" marL="0">
-              <a:buNone/>
-            </a:pPr>
-            <a:r>
-              <a:rPr lang="en-US" sz="1400" b="1" dirty="0">
-                <a:solidFill>
-                  <a:srgbClr val="FFFFFF"/>
-                </a:solidFill>
-                <a:latin typeface="Arial" pitchFamily="34" charset="0"/>
-                <a:ea typeface="Arial" pitchFamily="34" charset="-122"/>
-                <a:cs typeface="Arial" pitchFamily="34" charset="-120"/>
-              </a:rPr>
-              <a:t>3</a:t>
-            </a:r>
-            <a:endParaRPr lang="en-US" sz="1400" dirty="0"/>
-          </a:p>
-        </p:txBody>
-      </p:sp>
-      <p:sp>
-        <p:nvSpPr>
-          <p:cNvPr id="14" name="Text 11"/>
-          <p:cNvSpPr txBox="1"/>
-          <p:nvPr/>
-        </p:nvSpPr>
-        <p:spPr>
-          <a:xfrm>
-            <a:off x="685800" y="3447288"/>
-            <a:ext cx="4937760" cy="731520"/>
-          </a:xfrm>
-          <a:prstGeom prst="rect">
-            <a:avLst/>
-          </a:prstGeom>
-          <a:noFill/>
-          <a:ln/>
-        </p:spPr>
-        <p:txBody>
-          <a:bodyPr wrap="square" rtlCol="0" anchor="t"/>
-          <a:lstStyle/>
-          <a:p>
-            <a:pPr rtl="1" algn="r" indent="0" marL="0">
-              <a:buNone/>
-            </a:pPr>
-            <a:r>
-              <a:rPr lang="en-US" sz="1650" dirty="0">
-                <a:solidFill>
-                  <a:srgbClr val="1E2C24"/>
-                </a:solidFill>
-                <a:latin typeface="Arial" pitchFamily="34" charset="0"/>
-                <a:ea typeface="Arial" pitchFamily="34" charset="-122"/>
-                <a:cs typeface="Arial" pitchFamily="34" charset="-120"/>
-              </a:rPr>
-              <a:t>הוא מצרף את המסמכים הרלוונטיים לאותה הטבה.</a:t>
-            </a:r>
-            <a:endParaRPr lang="en-US" sz="1650" dirty="0"/>
-          </a:p>
-        </p:txBody>
-      </p:sp>
-      <p:sp>
-        <p:nvSpPr>
-          <p:cNvPr id="15" name="Shape 12"/>
-          <p:cNvSpPr/>
-          <p:nvPr/>
-        </p:nvSpPr>
-        <p:spPr>
-          <a:xfrm>
-            <a:off x="5769864" y="4343400"/>
+            <a:off x="5495544" y="4983480"/>
             <a:ext cx="402336" cy="402336"/>
           </a:xfrm>
           <a:prstGeom prst="ellipse">
@@ -2959,13 +3066,13 @@
       </p:sp>
       <p:sp>
         <p:nvSpPr>
-          <p:cNvPr id="16" name="Text 13"/>
-          <p:cNvSpPr txBox="1"/>
-          <p:nvPr/>
-        </p:nvSpPr>
-        <p:spPr>
-          <a:xfrm>
-            <a:off x="5769864" y="4343400"/>
+          <p:cNvPr id="19" name="Text 16"/>
+          <p:cNvSpPr txBox="1"/>
+          <p:nvPr/>
+        </p:nvSpPr>
+        <p:spPr>
+          <a:xfrm>
+            <a:off x="5495544" y="4983480"/>
             <a:ext cx="402336" cy="402336"/>
           </a:xfrm>
           <a:prstGeom prst="rect">
@@ -2990,7 +3097,7 @@
                 <a:ea typeface="Arial" pitchFamily="34" charset="-122"/>
                 <a:cs typeface="Arial" pitchFamily="34" charset="-120"/>
               </a:rPr>
-              <a:t>4</a:t>
+              <a:t>3</a:t>
             </a:r>
             <a:endParaRPr lang="en-US" sz="1400" dirty="0"/>
           </a:p>
@@ -2998,14 +3105,14 @@
       </p:sp>
       <p:sp>
         <p:nvSpPr>
-          <p:cNvPr id="17" name="Text 14"/>
-          <p:cNvSpPr txBox="1"/>
-          <p:nvPr/>
-        </p:nvSpPr>
-        <p:spPr>
-          <a:xfrm>
-            <a:off x="685800" y="4315968"/>
-            <a:ext cx="4937760" cy="731520"/>
+          <p:cNvPr id="20" name="Text 17"/>
+          <p:cNvSpPr txBox="1"/>
+          <p:nvPr/>
+        </p:nvSpPr>
+        <p:spPr>
+          <a:xfrm>
+            <a:off x="685800" y="4956048"/>
+            <a:ext cx="4663440" cy="685800"/>
           </a:xfrm>
           <a:prstGeom prst="rect">
             <a:avLst/>
@@ -3037,7 +3144,7 @@
       </p:sp>
       <p:pic>
         <p:nvPicPr>
-          <p:cNvPr id="18" name="Image 1" descr="/home/user/mazpen-m.r/build/deck/assets/emp_sent.png">    </p:cNvPr>
+          <p:cNvPr id="21" name="Image 1" descr="/home/user/mazpen-m.r/build/deck/assets/emp_sent.png">    </p:cNvPr>
           <p:cNvPicPr>
             <a:picLocks noChangeAspect="1"/>
           </p:cNvPicPr>
@@ -3051,8 +3158,8 @@
         </p:blipFill>
         <p:spPr>
           <a:xfrm>
-            <a:off x="6492240" y="2208188"/>
-            <a:ext cx="5010912" cy="1618663"/>
+            <a:off x="6309360" y="3413091"/>
+            <a:ext cx="5193792" cy="1677739"/>
           </a:xfrm>
           <a:prstGeom prst="rect">
             <a:avLst/>
@@ -3061,24 +3168,24 @@
       </p:pic>
       <p:sp>
         <p:nvSpPr>
-          <p:cNvPr id="19" name="Shape 15"/>
+          <p:cNvPr id="22" name="Shape 18"/>
           <p:cNvSpPr/>
           <p:nvPr/>
         </p:nvSpPr>
         <p:spPr>
           <a:xfrm>
-            <a:off x="6492240" y="4206240"/>
-            <a:ext cx="5010912" cy="1371600"/>
+            <a:off x="685800" y="5760720"/>
+            <a:ext cx="10817352" cy="566928"/>
           </a:xfrm>
           <a:prstGeom prst="roundRect">
             <a:avLst>
-              <a:gd name="adj" fmla="val 8000"/>
+              <a:gd name="adj" fmla="val 19355"/>
             </a:avLst>
           </a:prstGeom>
           <a:solidFill>
             <a:srgbClr val="FBEFE6"/>
           </a:solidFill>
-          <a:ln w="19050">
+          <a:ln w="17780">
             <a:solidFill>
               <a:srgbClr val="B85C22"/>
             </a:solidFill>
@@ -3088,30 +3195,30 @@
       </p:sp>
       <p:sp>
         <p:nvSpPr>
-          <p:cNvPr id="20" name="Text 16"/>
-          <p:cNvSpPr txBox="1"/>
-          <p:nvPr/>
-        </p:nvSpPr>
-        <p:spPr>
-          <a:xfrm>
-            <a:off x="6812280" y="4206240"/>
-            <a:ext cx="4416552" cy="1371600"/>
-          </a:xfrm>
-          <a:prstGeom prst="rect">
-            <a:avLst/>
-          </a:prstGeom>
-          <a:noFill/>
-          <a:ln/>
-        </p:spPr>
-        <p:txBody>
-          <a:bodyPr wrap="square" rtlCol="0" anchor="ctr"/>
-          <a:lstStyle/>
-          <a:p>
-            <a:pPr rtl="1" algn="r" indent="0" marL="0">
-              <a:buNone/>
-            </a:pPr>
-            <a:r>
-              <a:rPr lang="en-US" sz="1600" dirty="0">
+          <p:cNvPr id="23" name="Text 19"/>
+          <p:cNvSpPr txBox="1"/>
+          <p:nvPr/>
+        </p:nvSpPr>
+        <p:spPr>
+          <a:xfrm>
+            <a:off x="960120" y="5760720"/>
+            <a:ext cx="10268712" cy="566928"/>
+          </a:xfrm>
+          <a:prstGeom prst="rect">
+            <a:avLst/>
+          </a:prstGeom>
+          <a:noFill/>
+          <a:ln/>
+        </p:spPr>
+        <p:txBody>
+          <a:bodyPr wrap="square" lIns="0" tIns="0" rIns="0" bIns="0" rtlCol="0" anchor="ctr"/>
+          <a:lstStyle/>
+          <a:p>
+            <a:pPr rtl="1" algn="ctr" indent="0" marL="0">
+              <a:buNone/>
+            </a:pPr>
+            <a:r>
+              <a:rPr lang="en-US" sz="1550" dirty="0">
                 <a:solidFill>
                   <a:srgbClr val="1E2C24"/>
                 </a:solidFill>
@@ -3119,48 +3226,9 @@
                 <a:ea typeface="Arial" pitchFamily="34" charset="-122"/>
                 <a:cs typeface="Arial" pitchFamily="34" charset="-120"/>
               </a:rPr>
-              <a:t>המסמכים הנדרשים משתנים מהטבה להטבה, והם מפורטים בטופס עצמו.</a:t>
-            </a:r>
-            <a:endParaRPr lang="en-US" sz="1600" dirty="0"/>
-          </a:p>
-        </p:txBody>
-      </p:sp>
-      <p:sp>
-        <p:nvSpPr>
-          <p:cNvPr id="21" name="Text 17"/>
-          <p:cNvSpPr txBox="1"/>
-          <p:nvPr/>
-        </p:nvSpPr>
-        <p:spPr>
-          <a:xfrm>
-            <a:off x="685800" y="5486400"/>
-            <a:ext cx="10817352" cy="411480"/>
-          </a:xfrm>
-          <a:prstGeom prst="rect">
-            <a:avLst/>
-          </a:prstGeom>
-          <a:noFill/>
-          <a:ln/>
-        </p:spPr>
-        <p:txBody>
-          <a:bodyPr wrap="square" rtlCol="0" anchor="ctr"/>
-          <a:lstStyle/>
-          <a:p>
-            <a:pPr rtl="1" algn="ctr" indent="0" marL="0">
-              <a:buNone/>
-            </a:pPr>
-            <a:r>
-              <a:rPr lang="en-US" sz="1600" b="1" dirty="0">
-                <a:solidFill>
-                  <a:srgbClr val="B85C22"/>
-                </a:solidFill>
-                <a:latin typeface="Arial" pitchFamily="34" charset="0"/>
-                <a:ea typeface="Arial" pitchFamily="34" charset="-122"/>
-                <a:cs typeface="Arial" pitchFamily="34" charset="-120"/>
-              </a:rPr>
-              <a:t>הודעת האישור אומרת שהפנייה נקלטה — לא שהזכאות אושרה.</a:t>
-            </a:r>
-            <a:endParaRPr lang="en-US" sz="1600" dirty="0"/>
+              <a:t>המסמכים הנדרשים משתנים מהטבה להטבה ומפורטים בטופס. הודעת האישור אומרת שהפנייה נקלטה, לא שהזכאות אושרה.</a:t>
+            </a:r>
+            <a:endParaRPr lang="en-US" sz="1550" dirty="0"/>
           </a:p>
         </p:txBody>
       </p:sp>
@@ -5658,7 +5726,7 @@
                 <a:ea typeface="Arial" pitchFamily="34" charset="-122"/>
                 <a:cs typeface="Arial" pitchFamily="34" charset="-120"/>
               </a:rPr>
-              <a:t>חמישה דברים לקחת מכאן</a:t>
+              <a:t>דברים שיש לשים לב אליהם</a:t>
             </a:r>
             <a:endParaRPr lang="en-US" sz="3300" dirty="0"/>
           </a:p>
@@ -5711,12 +5779,12 @@
         </p:nvSpPr>
         <p:spPr>
           <a:xfrm>
-            <a:off x="685800" y="1691640"/>
-            <a:ext cx="10817352" cy="786384"/>
+            <a:off x="685800" y="1920240"/>
+            <a:ext cx="10817352" cy="1097280"/>
           </a:xfrm>
           <a:prstGeom prst="roundRect">
             <a:avLst>
-              <a:gd name="adj" fmla="val 13953"/>
+              <a:gd name="adj" fmla="val 10000"/>
             </a:avLst>
           </a:prstGeom>
           <a:solidFill>
@@ -5738,8 +5806,8 @@
         </p:nvSpPr>
         <p:spPr>
           <a:xfrm>
-            <a:off x="10908792" y="1892808"/>
-            <a:ext cx="384048" cy="384048"/>
+            <a:off x="10844784" y="2267712"/>
+            <a:ext cx="438912" cy="438912"/>
           </a:xfrm>
           <a:prstGeom prst="ellipse">
             <a:avLst/>
@@ -5763,8 +5831,8 @@
         </p:nvSpPr>
         <p:spPr>
           <a:xfrm>
-            <a:off x="10908792" y="1892808"/>
-            <a:ext cx="384048" cy="384048"/>
+            <a:off x="10844784" y="2267712"/>
+            <a:ext cx="438912" cy="438912"/>
           </a:xfrm>
           <a:prstGeom prst="rect">
             <a:avLst/>
@@ -5802,8 +5870,8 @@
         </p:nvSpPr>
         <p:spPr>
           <a:xfrm>
-            <a:off x="6949440" y="1691640"/>
-            <a:ext cx="3794760" cy="786384"/>
+            <a:off x="1005840" y="2084832"/>
+            <a:ext cx="9582912" cy="411480"/>
           </a:xfrm>
           <a:prstGeom prst="rect">
             <a:avLst/>
@@ -5819,7 +5887,7 @@
               <a:buNone/>
             </a:pPr>
             <a:r>
-              <a:rPr lang="en-US" sz="1750" b="1" dirty="0">
+              <a:rPr lang="en-US" sz="2000" b="1" dirty="0">
                 <a:solidFill>
                   <a:srgbClr val="14477E"/>
                 </a:solidFill>
@@ -5827,9 +5895,9 @@
                 <a:ea typeface="Arial" pitchFamily="34" charset="-122"/>
                 <a:cs typeface="Arial" pitchFamily="34" charset="-120"/>
               </a:rPr>
-              <a:t>המצפן מציג שנתיים אחורה</a:t>
-            </a:r>
-            <a:endParaRPr lang="en-US" sz="1750" dirty="0"/>
+              <a:t>"ההטבות שלי" מציג שנתיים אחורה</a:t>
+            </a:r>
+            <a:endParaRPr lang="en-US" sz="2000" dirty="0"/>
           </a:p>
         </p:txBody>
       </p:sp>
@@ -5841,17 +5909,17 @@
         </p:nvSpPr>
         <p:spPr>
           <a:xfrm>
-            <a:off x="1005840" y="1691640"/>
-            <a:ext cx="6035040" cy="786384"/>
-          </a:xfrm>
-          <a:prstGeom prst="rect">
-            <a:avLst/>
-          </a:prstGeom>
-          <a:noFill/>
-          <a:ln/>
-        </p:spPr>
-        <p:txBody>
-          <a:bodyPr wrap="square" rtlCol="0" anchor="ctr"/>
+            <a:off x="1005840" y="2487168"/>
+            <a:ext cx="9582912" cy="457200"/>
+          </a:xfrm>
+          <a:prstGeom prst="rect">
+            <a:avLst/>
+          </a:prstGeom>
+          <a:noFill/>
+          <a:ln/>
+        </p:spPr>
+        <p:txBody>
+          <a:bodyPr wrap="square" rtlCol="0" anchor="t"/>
           <a:lstStyle/>
           <a:p>
             <a:pPr rtl="1" algn="r" indent="0" marL="0">
@@ -5866,7 +5934,7 @@
                 <a:ea typeface="Arial" pitchFamily="34" charset="-122"/>
                 <a:cs typeface="Arial" pitchFamily="34" charset="-120"/>
               </a:rPr>
-              <a:t>"לא מופיע במצפן" אינו "לא מגיע לי".</a:t>
+              <a:t>הטבה שאינה מופיעה שם אינה בהכרח הטבה שאין עליה זכאות.</a:t>
             </a:r>
             <a:endParaRPr lang="en-US" sz="1550" dirty="0"/>
           </a:p>
@@ -5880,12 +5948,12 @@
         </p:nvSpPr>
         <p:spPr>
           <a:xfrm>
-            <a:off x="685800" y="2606040"/>
-            <a:ext cx="10817352" cy="786384"/>
+            <a:off x="685800" y="3246120"/>
+            <a:ext cx="10817352" cy="1097280"/>
           </a:xfrm>
           <a:prstGeom prst="roundRect">
             <a:avLst>
-              <a:gd name="adj" fmla="val 13953"/>
+              <a:gd name="adj" fmla="val 10000"/>
             </a:avLst>
           </a:prstGeom>
           <a:solidFill>
@@ -5907,8 +5975,8 @@
         </p:nvSpPr>
         <p:spPr>
           <a:xfrm>
-            <a:off x="10908792" y="2807208"/>
-            <a:ext cx="384048" cy="384048"/>
+            <a:off x="10844784" y="3593592"/>
+            <a:ext cx="438912" cy="438912"/>
           </a:xfrm>
           <a:prstGeom prst="ellipse">
             <a:avLst/>
@@ -5932,8 +6000,8 @@
         </p:nvSpPr>
         <p:spPr>
           <a:xfrm>
-            <a:off x="10908792" y="2807208"/>
-            <a:ext cx="384048" cy="384048"/>
+            <a:off x="10844784" y="3593592"/>
+            <a:ext cx="438912" cy="438912"/>
           </a:xfrm>
           <a:prstGeom prst="rect">
             <a:avLst/>
@@ -5971,8 +6039,8 @@
         </p:nvSpPr>
         <p:spPr>
           <a:xfrm>
-            <a:off x="6949440" y="2606040"/>
-            <a:ext cx="3794760" cy="786384"/>
+            <a:off x="1005840" y="3410712"/>
+            <a:ext cx="9582912" cy="411480"/>
           </a:xfrm>
           <a:prstGeom prst="rect">
             <a:avLst/>
@@ -5988,7 +6056,7 @@
               <a:buNone/>
             </a:pPr>
             <a:r>
-              <a:rPr lang="en-US" sz="1750" b="1" dirty="0">
+              <a:rPr lang="en-US" sz="2000" b="1" dirty="0">
                 <a:solidFill>
                   <a:srgbClr val="14477E"/>
                 </a:solidFill>
@@ -5996,9 +6064,9 @@
                 <a:ea typeface="Arial" pitchFamily="34" charset="-122"/>
                 <a:cs typeface="Arial" pitchFamily="34" charset="-120"/>
               </a:rPr>
-              <a:t>תמיד לפתוח תכנית</a:t>
-            </a:r>
-            <a:endParaRPr lang="en-US" sz="1750" dirty="0"/>
+              <a:t>חשבונית שהוגשה לתכנית לא מתאימה</a:t>
+            </a:r>
+            <a:endParaRPr lang="en-US" sz="2000" dirty="0"/>
           </a:p>
         </p:txBody>
       </p:sp>
@@ -6010,17 +6078,17 @@
         </p:nvSpPr>
         <p:spPr>
           <a:xfrm>
-            <a:off x="1005840" y="2606040"/>
-            <a:ext cx="6035040" cy="786384"/>
-          </a:xfrm>
-          <a:prstGeom prst="rect">
-            <a:avLst/>
-          </a:prstGeom>
-          <a:noFill/>
-          <a:ln/>
-        </p:spPr>
-        <p:txBody>
-          <a:bodyPr wrap="square" rtlCol="0" anchor="ctr"/>
+            <a:off x="1005840" y="3813048"/>
+            <a:ext cx="9582912" cy="457200"/>
+          </a:xfrm>
+          <a:prstGeom prst="rect">
+            <a:avLst/>
+          </a:prstGeom>
+          <a:noFill/>
+          <a:ln/>
+        </p:spPr>
+        <p:txBody>
+          <a:bodyPr wrap="square" rtlCol="0" anchor="t"/>
           <a:lstStyle/>
           <a:p>
             <a:pPr rtl="1" algn="r" indent="0" marL="0">
@@ -6035,7 +6103,7 @@
                 <a:ea typeface="Arial" pitchFamily="34" charset="-122"/>
                 <a:cs typeface="Arial" pitchFamily="34" charset="-120"/>
               </a:rPr>
-              <a:t>אחרת היא נעלמת מהמצפן, והמבוטח לא רואה דבר.</a:t>
+              <a:t>תמיד פותחים את התכנית שאליה הוגשה, דוחים אותה עם הנימוק המתאים, ופותחים את התכנית הנכונה.</a:t>
             </a:r>
             <a:endParaRPr lang="en-US" sz="1550" dirty="0"/>
           </a:p>
@@ -6049,12 +6117,12 @@
         </p:nvSpPr>
         <p:spPr>
           <a:xfrm>
-            <a:off x="685800" y="3520440"/>
-            <a:ext cx="10817352" cy="786384"/>
+            <a:off x="685800" y="4572000"/>
+            <a:ext cx="10817352" cy="1097280"/>
           </a:xfrm>
           <a:prstGeom prst="roundRect">
             <a:avLst>
-              <a:gd name="adj" fmla="val 13953"/>
+              <a:gd name="adj" fmla="val 10000"/>
             </a:avLst>
           </a:prstGeom>
           <a:solidFill>
@@ -6076,8 +6144,8 @@
         </p:nvSpPr>
         <p:spPr>
           <a:xfrm>
-            <a:off x="10908792" y="3721608"/>
-            <a:ext cx="384048" cy="384048"/>
+            <a:off x="10844784" y="4919472"/>
+            <a:ext cx="438912" cy="438912"/>
           </a:xfrm>
           <a:prstGeom prst="ellipse">
             <a:avLst/>
@@ -6101,8 +6169,8 @@
         </p:nvSpPr>
         <p:spPr>
           <a:xfrm>
-            <a:off x="10908792" y="3721608"/>
-            <a:ext cx="384048" cy="384048"/>
+            <a:off x="10844784" y="4919472"/>
+            <a:ext cx="438912" cy="438912"/>
           </a:xfrm>
           <a:prstGeom prst="rect">
             <a:avLst/>
@@ -6140,8 +6208,8 @@
         </p:nvSpPr>
         <p:spPr>
           <a:xfrm>
-            <a:off x="6949440" y="3520440"/>
-            <a:ext cx="3794760" cy="786384"/>
+            <a:off x="1005840" y="4736592"/>
+            <a:ext cx="9582912" cy="411480"/>
           </a:xfrm>
           <a:prstGeom prst="rect">
             <a:avLst/>
@@ -6157,7 +6225,7 @@
               <a:buNone/>
             </a:pPr>
             <a:r>
-              <a:rPr lang="en-US" sz="1750" b="1" dirty="0">
+              <a:rPr lang="en-US" sz="2000" b="1" dirty="0">
                 <a:solidFill>
                   <a:srgbClr val="14477E"/>
                 </a:solidFill>
@@ -6165,9 +6233,9 @@
                 <a:ea typeface="Arial" pitchFamily="34" charset="-122"/>
                 <a:cs typeface="Arial" pitchFamily="34" charset="-120"/>
               </a:rPr>
-              <a:t>הנימוק נקרא על ידי המבוטח</a:t>
-            </a:r>
-            <a:endParaRPr lang="en-US" sz="1750" dirty="0"/>
+              <a:t>נימוקי הדחייה נקראים על ידי המבוטח</a:t>
+            </a:r>
+            <a:endParaRPr lang="en-US" sz="2000" dirty="0"/>
           </a:p>
         </p:txBody>
       </p:sp>
@@ -6179,17 +6247,17 @@
         </p:nvSpPr>
         <p:spPr>
           <a:xfrm>
-            <a:off x="1005840" y="3520440"/>
-            <a:ext cx="6035040" cy="786384"/>
-          </a:xfrm>
-          <a:prstGeom prst="rect">
-            <a:avLst/>
-          </a:prstGeom>
-          <a:noFill/>
-          <a:ln/>
-        </p:spPr>
-        <p:txBody>
-          <a:bodyPr wrap="square" rtlCol="0" anchor="ctr"/>
+            <a:off x="1005840" y="5138928"/>
+            <a:ext cx="9582912" cy="457200"/>
+          </a:xfrm>
+          <a:prstGeom prst="rect">
+            <a:avLst/>
+          </a:prstGeom>
+          <a:noFill/>
+          <a:ln/>
+        </p:spPr>
+        <p:txBody>
+          <a:bodyPr wrap="square" rtlCol="0" anchor="t"/>
           <a:lstStyle/>
           <a:p>
             <a:pPr rtl="1" algn="r" indent="0" marL="0">
@@ -6204,345 +6272,7 @@
                 <a:ea typeface="Arial" pitchFamily="34" charset="-122"/>
                 <a:cs typeface="Arial" pitchFamily="34" charset="-120"/>
               </a:rPr>
-              <a:t>סיבת הדחייה מאישור ההחלטה מוצגת לו כלשונה.</a:t>
-            </a:r>
-            <a:endParaRPr lang="en-US" sz="1550" dirty="0"/>
-          </a:p>
-        </p:txBody>
-      </p:sp>
-      <p:sp>
-        <p:nvSpPr>
-          <p:cNvPr id="20" name="Shape 17"/>
-          <p:cNvSpPr/>
-          <p:nvPr/>
-        </p:nvSpPr>
-        <p:spPr>
-          <a:xfrm>
-            <a:off x="685800" y="4434840"/>
-            <a:ext cx="10817352" cy="786384"/>
-          </a:xfrm>
-          <a:prstGeom prst="roundRect">
-            <a:avLst>
-              <a:gd name="adj" fmla="val 13953"/>
-            </a:avLst>
-          </a:prstGeom>
-          <a:solidFill>
-            <a:srgbClr val="FFFFFF"/>
-          </a:solidFill>
-          <a:ln w="12700">
-            <a:solidFill>
-              <a:srgbClr val="CFE0D5"/>
-            </a:solidFill>
-            <a:prstDash val="solid"/>
-          </a:ln>
-        </p:spPr>
-      </p:sp>
-      <p:sp>
-        <p:nvSpPr>
-          <p:cNvPr id="21" name="Shape 18"/>
-          <p:cNvSpPr/>
-          <p:nvPr/>
-        </p:nvSpPr>
-        <p:spPr>
-          <a:xfrm>
-            <a:off x="10908792" y="4636008"/>
-            <a:ext cx="384048" cy="384048"/>
-          </a:xfrm>
-          <a:prstGeom prst="ellipse">
-            <a:avLst/>
-          </a:prstGeom>
-          <a:solidFill>
-            <a:srgbClr val="14477E"/>
-          </a:solidFill>
-          <a:ln w="25400">
-            <a:solidFill>
-              <a:srgbClr val="FFFFFF"/>
-            </a:solidFill>
-            <a:prstDash val="solid"/>
-          </a:ln>
-        </p:spPr>
-      </p:sp>
-      <p:sp>
-        <p:nvSpPr>
-          <p:cNvPr id="22" name="Text 19"/>
-          <p:cNvSpPr txBox="1"/>
-          <p:nvPr/>
-        </p:nvSpPr>
-        <p:spPr>
-          <a:xfrm>
-            <a:off x="10908792" y="4636008"/>
-            <a:ext cx="384048" cy="384048"/>
-          </a:xfrm>
-          <a:prstGeom prst="rect">
-            <a:avLst/>
-          </a:prstGeom>
-          <a:noFill/>
-          <a:ln/>
-        </p:spPr>
-        <p:txBody>
-          <a:bodyPr wrap="square" lIns="0" tIns="0" rIns="0" bIns="0" rtlCol="0" anchor="ctr"/>
-          <a:lstStyle/>
-          <a:p>
-            <a:pPr rtl="1" algn="ctr" indent="0" marL="0">
-              <a:buNone/>
-            </a:pPr>
-            <a:r>
-              <a:rPr lang="en-US" sz="1400" b="1" dirty="0">
-                <a:solidFill>
-                  <a:srgbClr val="FFFFFF"/>
-                </a:solidFill>
-                <a:latin typeface="Arial" pitchFamily="34" charset="0"/>
-                <a:ea typeface="Arial" pitchFamily="34" charset="-122"/>
-                <a:cs typeface="Arial" pitchFamily="34" charset="-120"/>
-              </a:rPr>
-              <a:t>4</a:t>
-            </a:r>
-            <a:endParaRPr lang="en-US" sz="1400" dirty="0"/>
-          </a:p>
-        </p:txBody>
-      </p:sp>
-      <p:sp>
-        <p:nvSpPr>
-          <p:cNvPr id="23" name="Text 20"/>
-          <p:cNvSpPr txBox="1"/>
-          <p:nvPr/>
-        </p:nvSpPr>
-        <p:spPr>
-          <a:xfrm>
-            <a:off x="6949440" y="4434840"/>
-            <a:ext cx="3794760" cy="786384"/>
-          </a:xfrm>
-          <a:prstGeom prst="rect">
-            <a:avLst/>
-          </a:prstGeom>
-          <a:noFill/>
-          <a:ln/>
-        </p:spPr>
-        <p:txBody>
-          <a:bodyPr wrap="square" rtlCol="0" anchor="ctr"/>
-          <a:lstStyle/>
-          <a:p>
-            <a:pPr rtl="1" algn="r" indent="0" marL="0">
-              <a:buNone/>
-            </a:pPr>
-            <a:r>
-              <a:rPr lang="en-US" sz="1750" b="1" dirty="0">
-                <a:solidFill>
-                  <a:srgbClr val="14477E"/>
-                </a:solidFill>
-                <a:latin typeface="Arial" pitchFamily="34" charset="0"/>
-                <a:ea typeface="Arial" pitchFamily="34" charset="-122"/>
-                <a:cs typeface="Arial" pitchFamily="34" charset="-120"/>
-              </a:rPr>
-              <a:t>קבלה בתכנית שגויה לא אובדת</a:t>
-            </a:r>
-            <a:endParaRPr lang="en-US" sz="1750" dirty="0"/>
-          </a:p>
-        </p:txBody>
-      </p:sp>
-      <p:sp>
-        <p:nvSpPr>
-          <p:cNvPr id="24" name="Text 21"/>
-          <p:cNvSpPr txBox="1"/>
-          <p:nvPr/>
-        </p:nvSpPr>
-        <p:spPr>
-          <a:xfrm>
-            <a:off x="1005840" y="4434840"/>
-            <a:ext cx="6035040" cy="786384"/>
-          </a:xfrm>
-          <a:prstGeom prst="rect">
-            <a:avLst/>
-          </a:prstGeom>
-          <a:noFill/>
-          <a:ln/>
-        </p:spPr>
-        <p:txBody>
-          <a:bodyPr wrap="square" rtlCol="0" anchor="ctr"/>
-          <a:lstStyle/>
-          <a:p>
-            <a:pPr rtl="1" algn="r" indent="0" marL="0">
-              <a:buNone/>
-            </a:pPr>
-            <a:r>
-              <a:rPr lang="en-US" sz="1550" dirty="0">
-                <a:solidFill>
-                  <a:srgbClr val="1E2C24"/>
-                </a:solidFill>
-                <a:latin typeface="Arial" pitchFamily="34" charset="0"/>
-                <a:ea typeface="Arial" pitchFamily="34" charset="-122"/>
-                <a:cs typeface="Arial" pitchFamily="34" charset="-120"/>
-              </a:rPr>
-              <a:t>משייכים אותה, והוא רואה "הועברה לטיפול בהטבה X".</a:t>
-            </a:r>
-            <a:endParaRPr lang="en-US" sz="1550" dirty="0"/>
-          </a:p>
-        </p:txBody>
-      </p:sp>
-      <p:sp>
-        <p:nvSpPr>
-          <p:cNvPr id="25" name="Shape 22"/>
-          <p:cNvSpPr/>
-          <p:nvPr/>
-        </p:nvSpPr>
-        <p:spPr>
-          <a:xfrm>
-            <a:off x="685800" y="5349240"/>
-            <a:ext cx="10817352" cy="786384"/>
-          </a:xfrm>
-          <a:prstGeom prst="roundRect">
-            <a:avLst>
-              <a:gd name="adj" fmla="val 13953"/>
-            </a:avLst>
-          </a:prstGeom>
-          <a:solidFill>
-            <a:srgbClr val="FFFFFF"/>
-          </a:solidFill>
-          <a:ln w="12700">
-            <a:solidFill>
-              <a:srgbClr val="CFE0D5"/>
-            </a:solidFill>
-            <a:prstDash val="solid"/>
-          </a:ln>
-        </p:spPr>
-      </p:sp>
-      <p:sp>
-        <p:nvSpPr>
-          <p:cNvPr id="26" name="Shape 23"/>
-          <p:cNvSpPr/>
-          <p:nvPr/>
-        </p:nvSpPr>
-        <p:spPr>
-          <a:xfrm>
-            <a:off x="10908792" y="5550408"/>
-            <a:ext cx="384048" cy="384048"/>
-          </a:xfrm>
-          <a:prstGeom prst="ellipse">
-            <a:avLst/>
-          </a:prstGeom>
-          <a:solidFill>
-            <a:srgbClr val="14477E"/>
-          </a:solidFill>
-          <a:ln w="25400">
-            <a:solidFill>
-              <a:srgbClr val="FFFFFF"/>
-            </a:solidFill>
-            <a:prstDash val="solid"/>
-          </a:ln>
-        </p:spPr>
-      </p:sp>
-      <p:sp>
-        <p:nvSpPr>
-          <p:cNvPr id="27" name="Text 24"/>
-          <p:cNvSpPr txBox="1"/>
-          <p:nvPr/>
-        </p:nvSpPr>
-        <p:spPr>
-          <a:xfrm>
-            <a:off x="10908792" y="5550408"/>
-            <a:ext cx="384048" cy="384048"/>
-          </a:xfrm>
-          <a:prstGeom prst="rect">
-            <a:avLst/>
-          </a:prstGeom>
-          <a:noFill/>
-          <a:ln/>
-        </p:spPr>
-        <p:txBody>
-          <a:bodyPr wrap="square" lIns="0" tIns="0" rIns="0" bIns="0" rtlCol="0" anchor="ctr"/>
-          <a:lstStyle/>
-          <a:p>
-            <a:pPr rtl="1" algn="ctr" indent="0" marL="0">
-              <a:buNone/>
-            </a:pPr>
-            <a:r>
-              <a:rPr lang="en-US" sz="1400" b="1" dirty="0">
-                <a:solidFill>
-                  <a:srgbClr val="FFFFFF"/>
-                </a:solidFill>
-                <a:latin typeface="Arial" pitchFamily="34" charset="0"/>
-                <a:ea typeface="Arial" pitchFamily="34" charset="-122"/>
-                <a:cs typeface="Arial" pitchFamily="34" charset="-120"/>
-              </a:rPr>
-              <a:t>5</a:t>
-            </a:r>
-            <a:endParaRPr lang="en-US" sz="1400" dirty="0"/>
-          </a:p>
-        </p:txBody>
-      </p:sp>
-      <p:sp>
-        <p:nvSpPr>
-          <p:cNvPr id="28" name="Text 25"/>
-          <p:cNvSpPr txBox="1"/>
-          <p:nvPr/>
-        </p:nvSpPr>
-        <p:spPr>
-          <a:xfrm>
-            <a:off x="6949440" y="5349240"/>
-            <a:ext cx="3794760" cy="786384"/>
-          </a:xfrm>
-          <a:prstGeom prst="rect">
-            <a:avLst/>
-          </a:prstGeom>
-          <a:noFill/>
-          <a:ln/>
-        </p:spPr>
-        <p:txBody>
-          <a:bodyPr wrap="square" rtlCol="0" anchor="ctr"/>
-          <a:lstStyle/>
-          <a:p>
-            <a:pPr rtl="1" algn="r" indent="0" marL="0">
-              <a:buNone/>
-            </a:pPr>
-            <a:r>
-              <a:rPr lang="en-US" sz="1750" b="1" dirty="0">
-                <a:solidFill>
-                  <a:srgbClr val="14477E"/>
-                </a:solidFill>
-                <a:latin typeface="Arial" pitchFamily="34" charset="0"/>
-                <a:ea typeface="Arial" pitchFamily="34" charset="-122"/>
-                <a:cs typeface="Arial" pitchFamily="34" charset="-120"/>
-              </a:rPr>
-              <a:t>"בטיפול" לא דורש הגשה חוזרת</a:t>
-            </a:r>
-            <a:endParaRPr lang="en-US" sz="1750" dirty="0"/>
-          </a:p>
-        </p:txBody>
-      </p:sp>
-      <p:sp>
-        <p:nvSpPr>
-          <p:cNvPr id="29" name="Text 26"/>
-          <p:cNvSpPr txBox="1"/>
-          <p:nvPr/>
-        </p:nvSpPr>
-        <p:spPr>
-          <a:xfrm>
-            <a:off x="1005840" y="5349240"/>
-            <a:ext cx="6035040" cy="786384"/>
-          </a:xfrm>
-          <a:prstGeom prst="rect">
-            <a:avLst/>
-          </a:prstGeom>
-          <a:noFill/>
-          <a:ln/>
-        </p:spPr>
-        <p:txBody>
-          <a:bodyPr wrap="square" rtlCol="0" anchor="ctr"/>
-          <a:lstStyle/>
-          <a:p>
-            <a:pPr rtl="1" algn="r" indent="0" marL="0">
-              <a:buNone/>
-            </a:pPr>
-            <a:r>
-              <a:rPr lang="en-US" sz="1550" dirty="0">
-                <a:solidFill>
-                  <a:srgbClr val="1E2C24"/>
-                </a:solidFill>
-                <a:latin typeface="Arial" pitchFamily="34" charset="0"/>
-                <a:ea typeface="Arial" pitchFamily="34" charset="-122"/>
-                <a:cs typeface="Arial" pitchFamily="34" charset="-120"/>
-              </a:rPr>
-              <a:t>וזה מה שאומרים לו בטלפון.</a:t>
+              <a:t>הנימוק שנבחר באישור ההחלטה מוצג לו כלשונו במצפן.</a:t>
             </a:r>
             <a:endParaRPr lang="en-US" sz="1550" dirty="0"/>
           </a:p>
@@ -9175,7 +8905,7 @@
                 <a:ea typeface="Arial" pitchFamily="34" charset="-122"/>
                 <a:cs typeface="Arial" pitchFamily="34" charset="-120"/>
               </a:rPr>
-              <a:t>חיפוש הטבה לפי שם או לפי נושא — טיפול או אביזר רפואי, שיקום מקצועי, רווחה ועוד.</a:t>
+              <a:t>חיפוש הטבה לפי שם, או לפי נושא: טיפול או אביזר רפואי, שיקום מקצועי, רווחה ועוד.</a:t>
             </a:r>
             <a:endParaRPr lang="en-US" sz="1300" dirty="0"/>
           </a:p>
@@ -9317,7 +9047,7 @@
                 <a:ea typeface="Arial" pitchFamily="34" charset="-122"/>
                 <a:cs typeface="Arial" pitchFamily="34" charset="-120"/>
               </a:rPr>
-              <a:t>רשימת ההטבות שהמבוטח הגיש, והסטטוס של כל אחת.</a:t>
+              <a:t>אילו הטבות כבר שולמו, מהי היתרה שנותרה לניצול, ומעקב אחר סטטוס הטיפול בבקשות שהוגשו.</a:t>
             </a:r>
             <a:endParaRPr lang="en-US" sz="1300" dirty="0"/>
           </a:p>
@@ -9459,9 +9189,48 @@
                 <a:ea typeface="Arial" pitchFamily="34" charset="-122"/>
                 <a:cs typeface="Arial" pitchFamily="34" charset="-120"/>
               </a:rPr>
-              <a:t>הטבות שייתכן שהוא זכאי להן ועדיין לא ביקש.</a:t>
+              <a:t>מגוון הטבות שייתכן שמגיעות לך, עם אפשרות להגיש בקשה מהירה לבדיקת הזכאות.</a:t>
             </a:r>
             <a:endParaRPr lang="en-US" sz="1300" dirty="0"/>
+          </a:p>
+        </p:txBody>
+      </p:sp>
+      <p:sp>
+        <p:nvSpPr>
+          <p:cNvPr id="23" name="Text 19"/>
+          <p:cNvSpPr txBox="1"/>
+          <p:nvPr/>
+        </p:nvSpPr>
+        <p:spPr>
+          <a:xfrm>
+            <a:off x="8595360" y="5623560"/>
+            <a:ext cx="2907792" cy="365760"/>
+          </a:xfrm>
+          <a:prstGeom prst="rect">
+            <a:avLst/>
+          </a:prstGeom>
+          <a:noFill/>
+          <a:ln/>
+        </p:spPr>
+        <p:txBody>
+          <a:bodyPr wrap="square" rtlCol="0" anchor="ctr"/>
+          <a:lstStyle/>
+          <a:p>
+            <a:pPr rtl="1" algn="r" indent="0" marL="0">
+              <a:buNone/>
+            </a:pPr>
+            <a:r>
+              <a:rPr lang="en-US" sz="1200" dirty="0">
+                <a:solidFill>
+                  <a:srgbClr val="93A79B"/>
+                </a:solidFill>
+                <a:latin typeface="Arial" pitchFamily="34" charset="0"/>
+                <a:ea typeface="Arial" pitchFamily="34" charset="-122"/>
+                <a:cs typeface="Arial" pitchFamily="34" charset="-120"/>
+              </a:rPr>
+              <a:t>שני ההסברים התחתונים הם הנוסח שהמצפן עצמו מציג למבוטח.</a:t>
+            </a:r>
+            <a:endParaRPr lang="en-US" sz="1200" dirty="0"/>
           </a:p>
         </p:txBody>
       </p:sp>
@@ -9586,7 +9355,7 @@
                 <a:ea typeface="Arial" pitchFamily="34" charset="-122"/>
                 <a:cs typeface="Arial" pitchFamily="34" charset="-120"/>
               </a:rPr>
-              <a:t>תכניות מתיק השיקום — מה בדיוק מוצג בכל שורה</a:t>
+              <a:t>רמה ראשונה: מה שרואים ברשימה, לפני שנכנסים פנימה</a:t>
             </a:r>
             <a:endParaRPr lang="en-US" sz="1550" dirty="0"/>
           </a:p>
@@ -9631,20 +9400,83 @@
           </a:p>
         </p:txBody>
       </p:sp>
-      <p:sp>
-        <p:nvSpPr>
-          <p:cNvPr id="6" name="Shape 3"/>
+      <p:pic>
+        <p:nvPicPr>
+          <p:cNvPr id="6" name="Image 1" descr="/home/user/mazpen-m.r/build/deck/assets/benefit.png">    </p:cNvPr>
+          <p:cNvPicPr>
+            <a:picLocks noChangeAspect="1"/>
+          </p:cNvPicPr>
+          <p:nvPr/>
+        </p:nvPicPr>
+        <p:blipFill>
+          <a:blip r:embed="rId2"/>
+          <a:stretch>
+            <a:fillRect/>
+          </a:stretch>
+        </p:blipFill>
+        <p:spPr>
+          <a:xfrm>
+            <a:off x="1172343" y="1444752"/>
+            <a:ext cx="6799315" cy="4297680"/>
+          </a:xfrm>
+          <a:prstGeom prst="rect">
+            <a:avLst/>
+          </a:prstGeom>
+        </p:spPr>
+      </p:pic>
+      <p:sp>
+        <p:nvSpPr>
+          <p:cNvPr id="7" name="Text 3"/>
+          <p:cNvSpPr txBox="1"/>
+          <p:nvPr/>
+        </p:nvSpPr>
+        <p:spPr>
+          <a:xfrm>
+            <a:off x="8732520" y="1572768"/>
+            <a:ext cx="2770632" cy="274320"/>
+          </a:xfrm>
+          <a:prstGeom prst="rect">
+            <a:avLst/>
+          </a:prstGeom>
+          <a:noFill/>
+          <a:ln/>
+        </p:spPr>
+        <p:txBody>
+          <a:bodyPr wrap="square" rtlCol="0" anchor="ctr"/>
+          <a:lstStyle/>
+          <a:p>
+            <a:pPr rtl="1" algn="r" indent="0" marL="0">
+              <a:buNone/>
+            </a:pPr>
+            <a:r>
+              <a:rPr lang="en-US" sz="1200" b="1" dirty="0">
+                <a:solidFill>
+                  <a:srgbClr val="93A79B"/>
+                </a:solidFill>
+                <a:latin typeface="Arial" pitchFamily="34" charset="0"/>
+                <a:ea typeface="Arial" pitchFamily="34" charset="-122"/>
+                <a:cs typeface="Arial" pitchFamily="34" charset="-120"/>
+              </a:rPr>
+              <a:t>בלשון המצפן</a:t>
+            </a:r>
+            <a:endParaRPr lang="en-US" sz="1200" dirty="0"/>
+          </a:p>
+        </p:txBody>
+      </p:sp>
+      <p:sp>
+        <p:nvSpPr>
+          <p:cNvPr id="8" name="Shape 4"/>
           <p:cNvSpPr/>
           <p:nvPr/>
         </p:nvSpPr>
         <p:spPr>
           <a:xfrm>
-            <a:off x="685800" y="1691640"/>
-            <a:ext cx="6309360" cy="658368"/>
+            <a:off x="8732520" y="1874520"/>
+            <a:ext cx="2770632" cy="1417320"/>
           </a:xfrm>
           <a:prstGeom prst="roundRect">
             <a:avLst>
-              <a:gd name="adj" fmla="val 16667"/>
+              <a:gd name="adj" fmla="val 7742"/>
             </a:avLst>
           </a:prstGeom>
           <a:solidFill>
@@ -9660,14 +9492,14 @@
       </p:sp>
       <p:sp>
         <p:nvSpPr>
-          <p:cNvPr id="7" name="Text 4"/>
-          <p:cNvSpPr txBox="1"/>
-          <p:nvPr/>
-        </p:nvSpPr>
-        <p:spPr>
-          <a:xfrm>
-            <a:off x="4160520" y="1691640"/>
-            <a:ext cx="2743200" cy="658368"/>
+          <p:cNvPr id="9" name="Text 5"/>
+          <p:cNvSpPr txBox="1"/>
+          <p:nvPr/>
+        </p:nvSpPr>
+        <p:spPr>
+          <a:xfrm>
+            <a:off x="8961120" y="1874520"/>
+            <a:ext cx="2313432" cy="1417320"/>
           </a:xfrm>
           <a:prstGeom prst="rect">
             <a:avLst/>
@@ -9683,30 +9515,30 @@
               <a:buNone/>
             </a:pPr>
             <a:r>
-              <a:rPr lang="en-US" sz="1650" b="1" dirty="0">
-                <a:solidFill>
-                  <a:srgbClr val="14477E"/>
-                </a:solidFill>
-                <a:latin typeface="Arial" pitchFamily="34" charset="0"/>
-                <a:ea typeface="Arial" pitchFamily="34" charset="-122"/>
-                <a:cs typeface="Arial" pitchFamily="34" charset="-120"/>
-              </a:rPr>
-              <a:t>תאריך ההגשה</a:t>
-            </a:r>
-            <a:endParaRPr lang="en-US" sz="1650" dirty="0"/>
-          </a:p>
-        </p:txBody>
-      </p:sp>
-      <p:sp>
-        <p:nvSpPr>
-          <p:cNvPr id="8" name="Text 5"/>
-          <p:cNvSpPr txBox="1"/>
-          <p:nvPr/>
-        </p:nvSpPr>
-        <p:spPr>
-          <a:xfrm>
-            <a:off x="960120" y="1691640"/>
-            <a:ext cx="3291840" cy="658368"/>
+              <a:rPr lang="en-US" sz="1450" dirty="0">
+                <a:solidFill>
+                  <a:srgbClr val="1E2C24"/>
+                </a:solidFill>
+                <a:latin typeface="Arial" pitchFamily="34" charset="0"/>
+                <a:ea typeface="Arial" pitchFamily="34" charset="-122"/>
+                <a:cs typeface="Arial" pitchFamily="34" charset="-120"/>
+              </a:rPr>
+              <a:t>אילו הטבות כבר שולמו, מהי היתרה שנותרה לניצול, ומעקב אחר סטטוס הטיפול בבקשות שהוגשו.</a:t>
+            </a:r>
+            <a:endParaRPr lang="en-US" sz="1450" dirty="0"/>
+          </a:p>
+        </p:txBody>
+      </p:sp>
+      <p:sp>
+        <p:nvSpPr>
+          <p:cNvPr id="10" name="Text 6"/>
+          <p:cNvSpPr txBox="1"/>
+          <p:nvPr/>
+        </p:nvSpPr>
+        <p:spPr>
+          <a:xfrm>
+            <a:off x="8732520" y="3456432"/>
+            <a:ext cx="2770632" cy="274320"/>
           </a:xfrm>
           <a:prstGeom prst="rect">
             <a:avLst/>
@@ -9722,460 +9554,394 @@
               <a:buNone/>
             </a:pPr>
             <a:r>
-              <a:rPr lang="en-US" sz="1450" dirty="0">
-                <a:solidFill>
-                  <a:srgbClr val="64796C"/>
-                </a:solidFill>
-                <a:latin typeface="Arial" pitchFamily="34" charset="0"/>
-                <a:ea typeface="Arial" pitchFamily="34" charset="-122"/>
-                <a:cs typeface="Arial" pitchFamily="34" charset="-120"/>
-              </a:rPr>
-              <a:t>מתי הוגשה הבקשה</a:t>
-            </a:r>
-            <a:endParaRPr lang="en-US" sz="1450" dirty="0"/>
-          </a:p>
-        </p:txBody>
-      </p:sp>
-      <p:sp>
-        <p:nvSpPr>
-          <p:cNvPr id="9" name="Shape 6"/>
+              <a:rPr lang="en-US" sz="1200" b="1" dirty="0">
+                <a:solidFill>
+                  <a:srgbClr val="93A79B"/>
+                </a:solidFill>
+                <a:latin typeface="Arial" pitchFamily="34" charset="0"/>
+                <a:ea typeface="Arial" pitchFamily="34" charset="-122"/>
+                <a:cs typeface="Arial" pitchFamily="34" charset="-120"/>
+              </a:rPr>
+              <a:t>ומה מופיע בכל שורה</a:t>
+            </a:r>
+            <a:endParaRPr lang="en-US" sz="1200" dirty="0"/>
+          </a:p>
+        </p:txBody>
+      </p:sp>
+      <p:sp>
+        <p:nvSpPr>
+          <p:cNvPr id="11" name="Shape 7"/>
           <p:cNvSpPr/>
           <p:nvPr/>
         </p:nvSpPr>
         <p:spPr>
           <a:xfrm>
-            <a:off x="685800" y="2478024"/>
-            <a:ext cx="6309360" cy="658368"/>
+            <a:off x="11320272" y="3886200"/>
+            <a:ext cx="109728" cy="109728"/>
+          </a:xfrm>
+          <a:prstGeom prst="ellipse">
+            <a:avLst/>
+          </a:prstGeom>
+          <a:solidFill>
+            <a:srgbClr val="14477E"/>
+          </a:solidFill>
+          <a:ln/>
+        </p:spPr>
+      </p:sp>
+      <p:sp>
+        <p:nvSpPr>
+          <p:cNvPr id="12" name="Text 8"/>
+          <p:cNvSpPr txBox="1"/>
+          <p:nvPr/>
+        </p:nvSpPr>
+        <p:spPr>
+          <a:xfrm>
+            <a:off x="8732520" y="3767328"/>
+            <a:ext cx="2450592" cy="347472"/>
+          </a:xfrm>
+          <a:prstGeom prst="rect">
+            <a:avLst/>
+          </a:prstGeom>
+          <a:noFill/>
+          <a:ln/>
+        </p:spPr>
+        <p:txBody>
+          <a:bodyPr wrap="square" rtlCol="0" anchor="ctr"/>
+          <a:lstStyle/>
+          <a:p>
+            <a:pPr rtl="1" algn="r" indent="0" marL="0">
+              <a:buNone/>
+            </a:pPr>
+            <a:r>
+              <a:rPr lang="en-US" sz="1500" dirty="0">
+                <a:solidFill>
+                  <a:srgbClr val="1E2C24"/>
+                </a:solidFill>
+                <a:latin typeface="Arial" pitchFamily="34" charset="0"/>
+                <a:ea typeface="Arial" pitchFamily="34" charset="-122"/>
+                <a:cs typeface="Arial" pitchFamily="34" charset="-120"/>
+              </a:rPr>
+              <a:t>סטטוס ההטבה</a:t>
+            </a:r>
+            <a:endParaRPr lang="en-US" sz="1500" dirty="0"/>
+          </a:p>
+        </p:txBody>
+      </p:sp>
+      <p:sp>
+        <p:nvSpPr>
+          <p:cNvPr id="13" name="Shape 9"/>
+          <p:cNvSpPr/>
+          <p:nvPr/>
+        </p:nvSpPr>
+        <p:spPr>
+          <a:xfrm>
+            <a:off x="11320272" y="4270248"/>
+            <a:ext cx="109728" cy="109728"/>
+          </a:xfrm>
+          <a:prstGeom prst="ellipse">
+            <a:avLst/>
+          </a:prstGeom>
+          <a:solidFill>
+            <a:srgbClr val="14477E"/>
+          </a:solidFill>
+          <a:ln/>
+        </p:spPr>
+      </p:sp>
+      <p:sp>
+        <p:nvSpPr>
+          <p:cNvPr id="14" name="Text 10"/>
+          <p:cNvSpPr txBox="1"/>
+          <p:nvPr/>
+        </p:nvSpPr>
+        <p:spPr>
+          <a:xfrm>
+            <a:off x="8732520" y="4151376"/>
+            <a:ext cx="2450592" cy="347472"/>
+          </a:xfrm>
+          <a:prstGeom prst="rect">
+            <a:avLst/>
+          </a:prstGeom>
+          <a:noFill/>
+          <a:ln/>
+        </p:spPr>
+        <p:txBody>
+          <a:bodyPr wrap="square" rtlCol="0" anchor="ctr"/>
+          <a:lstStyle/>
+          <a:p>
+            <a:pPr rtl="1" algn="r" indent="0" marL="0">
+              <a:buNone/>
+            </a:pPr>
+            <a:r>
+              <a:rPr lang="en-US" sz="1500" dirty="0">
+                <a:solidFill>
+                  <a:srgbClr val="1E2C24"/>
+                </a:solidFill>
+                <a:latin typeface="Arial" pitchFamily="34" charset="0"/>
+                <a:ea typeface="Arial" pitchFamily="34" charset="-122"/>
+                <a:cs typeface="Arial" pitchFamily="34" charset="-120"/>
+              </a:rPr>
+              <a:t>תקופת הזכאות</a:t>
+            </a:r>
+            <a:endParaRPr lang="en-US" sz="1500" dirty="0"/>
+          </a:p>
+        </p:txBody>
+      </p:sp>
+      <p:sp>
+        <p:nvSpPr>
+          <p:cNvPr id="15" name="Shape 11"/>
+          <p:cNvSpPr/>
+          <p:nvPr/>
+        </p:nvSpPr>
+        <p:spPr>
+          <a:xfrm>
+            <a:off x="11320272" y="4654296"/>
+            <a:ext cx="109728" cy="109728"/>
+          </a:xfrm>
+          <a:prstGeom prst="ellipse">
+            <a:avLst/>
+          </a:prstGeom>
+          <a:solidFill>
+            <a:srgbClr val="14477E"/>
+          </a:solidFill>
+          <a:ln/>
+        </p:spPr>
+      </p:sp>
+      <p:sp>
+        <p:nvSpPr>
+          <p:cNvPr id="16" name="Text 12"/>
+          <p:cNvSpPr txBox="1"/>
+          <p:nvPr/>
+        </p:nvSpPr>
+        <p:spPr>
+          <a:xfrm>
+            <a:off x="8732520" y="4535424"/>
+            <a:ext cx="2450592" cy="347472"/>
+          </a:xfrm>
+          <a:prstGeom prst="rect">
+            <a:avLst/>
+          </a:prstGeom>
+          <a:noFill/>
+          <a:ln/>
+        </p:spPr>
+        <p:txBody>
+          <a:bodyPr wrap="square" rtlCol="0" anchor="ctr"/>
+          <a:lstStyle/>
+          <a:p>
+            <a:pPr rtl="1" algn="r" indent="0" marL="0">
+              <a:buNone/>
+            </a:pPr>
+            <a:r>
+              <a:rPr lang="en-US" sz="1500" dirty="0">
+                <a:solidFill>
+                  <a:srgbClr val="1E2C24"/>
+                </a:solidFill>
+                <a:latin typeface="Arial" pitchFamily="34" charset="0"/>
+                <a:ea typeface="Arial" pitchFamily="34" charset="-122"/>
+                <a:cs typeface="Arial" pitchFamily="34" charset="-120"/>
+              </a:rPr>
+              <a:t>סכום ההטבה</a:t>
+            </a:r>
+            <a:endParaRPr lang="en-US" sz="1500" dirty="0"/>
+          </a:p>
+        </p:txBody>
+      </p:sp>
+      <p:sp>
+        <p:nvSpPr>
+          <p:cNvPr id="17" name="Shape 13"/>
+          <p:cNvSpPr/>
+          <p:nvPr/>
+        </p:nvSpPr>
+        <p:spPr>
+          <a:xfrm>
+            <a:off x="11320272" y="5038344"/>
+            <a:ext cx="109728" cy="109728"/>
+          </a:xfrm>
+          <a:prstGeom prst="ellipse">
+            <a:avLst/>
+          </a:prstGeom>
+          <a:solidFill>
+            <a:srgbClr val="14477E"/>
+          </a:solidFill>
+          <a:ln/>
+        </p:spPr>
+      </p:sp>
+      <p:sp>
+        <p:nvSpPr>
+          <p:cNvPr id="18" name="Text 14"/>
+          <p:cNvSpPr txBox="1"/>
+          <p:nvPr/>
+        </p:nvSpPr>
+        <p:spPr>
+          <a:xfrm>
+            <a:off x="8732520" y="4919472"/>
+            <a:ext cx="2450592" cy="347472"/>
+          </a:xfrm>
+          <a:prstGeom prst="rect">
+            <a:avLst/>
+          </a:prstGeom>
+          <a:noFill/>
+          <a:ln/>
+        </p:spPr>
+        <p:txBody>
+          <a:bodyPr wrap="square" rtlCol="0" anchor="ctr"/>
+          <a:lstStyle/>
+          <a:p>
+            <a:pPr rtl="1" algn="r" indent="0" marL="0">
+              <a:buNone/>
+            </a:pPr>
+            <a:r>
+              <a:rPr lang="en-US" sz="1500" dirty="0">
+                <a:solidFill>
+                  <a:srgbClr val="1E2C24"/>
+                </a:solidFill>
+                <a:latin typeface="Arial" pitchFamily="34" charset="0"/>
+                <a:ea typeface="Arial" pitchFamily="34" charset="-122"/>
+                <a:cs typeface="Arial" pitchFamily="34" charset="-120"/>
+              </a:rPr>
+              <a:t>כמות</a:t>
+            </a:r>
+            <a:endParaRPr lang="en-US" sz="1500" dirty="0"/>
+          </a:p>
+        </p:txBody>
+      </p:sp>
+      <p:sp>
+        <p:nvSpPr>
+          <p:cNvPr id="19" name="Shape 15"/>
+          <p:cNvSpPr/>
+          <p:nvPr/>
+        </p:nvSpPr>
+        <p:spPr>
+          <a:xfrm>
+            <a:off x="11320272" y="5422392"/>
+            <a:ext cx="109728" cy="109728"/>
+          </a:xfrm>
+          <a:prstGeom prst="ellipse">
+            <a:avLst/>
+          </a:prstGeom>
+          <a:solidFill>
+            <a:srgbClr val="14477E"/>
+          </a:solidFill>
+          <a:ln/>
+        </p:spPr>
+      </p:sp>
+      <p:sp>
+        <p:nvSpPr>
+          <p:cNvPr id="20" name="Text 16"/>
+          <p:cNvSpPr txBox="1"/>
+          <p:nvPr/>
+        </p:nvSpPr>
+        <p:spPr>
+          <a:xfrm>
+            <a:off x="8732520" y="5303520"/>
+            <a:ext cx="2450592" cy="347472"/>
+          </a:xfrm>
+          <a:prstGeom prst="rect">
+            <a:avLst/>
+          </a:prstGeom>
+          <a:noFill/>
+          <a:ln/>
+        </p:spPr>
+        <p:txBody>
+          <a:bodyPr wrap="square" rtlCol="0" anchor="ctr"/>
+          <a:lstStyle/>
+          <a:p>
+            <a:pPr rtl="1" algn="r" indent="0" marL="0">
+              <a:buNone/>
+            </a:pPr>
+            <a:r>
+              <a:rPr lang="en-US" sz="1500" dirty="0">
+                <a:solidFill>
+                  <a:srgbClr val="1E2C24"/>
+                </a:solidFill>
+                <a:latin typeface="Arial" pitchFamily="34" charset="0"/>
+                <a:ea typeface="Arial" pitchFamily="34" charset="-122"/>
+                <a:cs typeface="Arial" pitchFamily="34" charset="-120"/>
+              </a:rPr>
+              <a:t>סוג התשלום</a:t>
+            </a:r>
+            <a:endParaRPr lang="en-US" sz="1500" dirty="0"/>
+          </a:p>
+        </p:txBody>
+      </p:sp>
+      <p:sp>
+        <p:nvSpPr>
+          <p:cNvPr id="21" name="Shape 17"/>
+          <p:cNvSpPr/>
+          <p:nvPr/>
+        </p:nvSpPr>
+        <p:spPr>
+          <a:xfrm>
+            <a:off x="11320272" y="5806440"/>
+            <a:ext cx="109728" cy="109728"/>
+          </a:xfrm>
+          <a:prstGeom prst="ellipse">
+            <a:avLst/>
+          </a:prstGeom>
+          <a:solidFill>
+            <a:srgbClr val="14477E"/>
+          </a:solidFill>
+          <a:ln/>
+        </p:spPr>
+      </p:sp>
+      <p:sp>
+        <p:nvSpPr>
+          <p:cNvPr id="22" name="Text 18"/>
+          <p:cNvSpPr txBox="1"/>
+          <p:nvPr/>
+        </p:nvSpPr>
+        <p:spPr>
+          <a:xfrm>
+            <a:off x="8732520" y="5687568"/>
+            <a:ext cx="2450592" cy="347472"/>
+          </a:xfrm>
+          <a:prstGeom prst="rect">
+            <a:avLst/>
+          </a:prstGeom>
+          <a:noFill/>
+          <a:ln/>
+        </p:spPr>
+        <p:txBody>
+          <a:bodyPr wrap="square" rtlCol="0" anchor="ctr"/>
+          <a:lstStyle/>
+          <a:p>
+            <a:pPr rtl="1" algn="r" indent="0" marL="0">
+              <a:buNone/>
+            </a:pPr>
+            <a:r>
+              <a:rPr lang="en-US" sz="1500" dirty="0">
+                <a:solidFill>
+                  <a:srgbClr val="1E2C24"/>
+                </a:solidFill>
+                <a:latin typeface="Arial" pitchFamily="34" charset="0"/>
+                <a:ea typeface="Arial" pitchFamily="34" charset="-122"/>
+                <a:cs typeface="Arial" pitchFamily="34" charset="-120"/>
+              </a:rPr>
+              <a:t>כפתור "פרטים נוספים"</a:t>
+            </a:r>
+            <a:endParaRPr lang="en-US" sz="1500" dirty="0"/>
+          </a:p>
+        </p:txBody>
+      </p:sp>
+      <p:sp>
+        <p:nvSpPr>
+          <p:cNvPr id="23" name="Shape 19"/>
+          <p:cNvSpPr/>
+          <p:nvPr/>
+        </p:nvSpPr>
+        <p:spPr>
+          <a:xfrm>
+            <a:off x="685800" y="5870448"/>
+            <a:ext cx="10817352" cy="457200"/>
           </a:xfrm>
           <a:prstGeom prst="roundRect">
             <a:avLst>
-              <a:gd name="adj" fmla="val 16667"/>
-            </a:avLst>
-          </a:prstGeom>
-          <a:solidFill>
-            <a:srgbClr val="FFFFFF"/>
-          </a:solidFill>
-          <a:ln w="12700">
-            <a:solidFill>
-              <a:srgbClr val="CFE0D5"/>
-            </a:solidFill>
-            <a:prstDash val="solid"/>
-          </a:ln>
-        </p:spPr>
-      </p:sp>
-      <p:sp>
-        <p:nvSpPr>
-          <p:cNvPr id="10" name="Text 7"/>
-          <p:cNvSpPr txBox="1"/>
-          <p:nvPr/>
-        </p:nvSpPr>
-        <p:spPr>
-          <a:xfrm>
-            <a:off x="4160520" y="2478024"/>
-            <a:ext cx="2743200" cy="658368"/>
-          </a:xfrm>
-          <a:prstGeom prst="rect">
-            <a:avLst/>
-          </a:prstGeom>
-          <a:noFill/>
-          <a:ln/>
-        </p:spPr>
-        <p:txBody>
-          <a:bodyPr wrap="square" rtlCol="0" anchor="ctr"/>
-          <a:lstStyle/>
-          <a:p>
-            <a:pPr rtl="1" algn="r" indent="0" marL="0">
-              <a:buNone/>
-            </a:pPr>
-            <a:r>
-              <a:rPr lang="en-US" sz="1650" b="1" dirty="0">
-                <a:solidFill>
-                  <a:srgbClr val="14477E"/>
-                </a:solidFill>
-                <a:latin typeface="Arial" pitchFamily="34" charset="0"/>
-                <a:ea typeface="Arial" pitchFamily="34" charset="-122"/>
-                <a:cs typeface="Arial" pitchFamily="34" charset="-120"/>
-              </a:rPr>
-              <a:t>סטטוס הטיפול</a:t>
-            </a:r>
-            <a:endParaRPr lang="en-US" sz="1650" dirty="0"/>
-          </a:p>
-        </p:txBody>
-      </p:sp>
-      <p:sp>
-        <p:nvSpPr>
-          <p:cNvPr id="11" name="Text 8"/>
-          <p:cNvSpPr txBox="1"/>
-          <p:nvPr/>
-        </p:nvSpPr>
-        <p:spPr>
-          <a:xfrm>
-            <a:off x="960120" y="2478024"/>
-            <a:ext cx="3291840" cy="658368"/>
-          </a:xfrm>
-          <a:prstGeom prst="rect">
-            <a:avLst/>
-          </a:prstGeom>
-          <a:noFill/>
-          <a:ln/>
-        </p:spPr>
-        <p:txBody>
-          <a:bodyPr wrap="square" rtlCol="0" anchor="ctr"/>
-          <a:lstStyle/>
-          <a:p>
-            <a:pPr rtl="1" algn="r" indent="0" marL="0">
-              <a:buNone/>
-            </a:pPr>
-            <a:r>
-              <a:rPr lang="en-US" sz="1450" dirty="0">
-                <a:solidFill>
-                  <a:srgbClr val="64796C"/>
-                </a:solidFill>
-                <a:latin typeface="Arial" pitchFamily="34" charset="0"/>
-                <a:ea typeface="Arial" pitchFamily="34" charset="-122"/>
-                <a:cs typeface="Arial" pitchFamily="34" charset="-120"/>
-              </a:rPr>
-              <a:t>אושרה · אושרה חלקית · נדחתה · בטיפול</a:t>
-            </a:r>
-            <a:endParaRPr lang="en-US" sz="1450" dirty="0"/>
-          </a:p>
-        </p:txBody>
-      </p:sp>
-      <p:sp>
-        <p:nvSpPr>
-          <p:cNvPr id="12" name="Shape 9"/>
-          <p:cNvSpPr/>
-          <p:nvPr/>
-        </p:nvSpPr>
-        <p:spPr>
-          <a:xfrm>
-            <a:off x="685800" y="3264408"/>
-            <a:ext cx="6309360" cy="658368"/>
-          </a:xfrm>
-          <a:prstGeom prst="roundRect">
-            <a:avLst>
-              <a:gd name="adj" fmla="val 16667"/>
-            </a:avLst>
-          </a:prstGeom>
-          <a:solidFill>
-            <a:srgbClr val="FFFFFF"/>
-          </a:solidFill>
-          <a:ln w="12700">
-            <a:solidFill>
-              <a:srgbClr val="CFE0D5"/>
-            </a:solidFill>
-            <a:prstDash val="solid"/>
-          </a:ln>
-        </p:spPr>
-      </p:sp>
-      <p:sp>
-        <p:nvSpPr>
-          <p:cNvPr id="13" name="Text 10"/>
-          <p:cNvSpPr txBox="1"/>
-          <p:nvPr/>
-        </p:nvSpPr>
-        <p:spPr>
-          <a:xfrm>
-            <a:off x="4160520" y="3264408"/>
-            <a:ext cx="2743200" cy="658368"/>
-          </a:xfrm>
-          <a:prstGeom prst="rect">
-            <a:avLst/>
-          </a:prstGeom>
-          <a:noFill/>
-          <a:ln/>
-        </p:spPr>
-        <p:txBody>
-          <a:bodyPr wrap="square" rtlCol="0" anchor="ctr"/>
-          <a:lstStyle/>
-          <a:p>
-            <a:pPr rtl="1" algn="r" indent="0" marL="0">
-              <a:buNone/>
-            </a:pPr>
-            <a:r>
-              <a:rPr lang="en-US" sz="1650" b="1" dirty="0">
-                <a:solidFill>
-                  <a:srgbClr val="14477E"/>
-                </a:solidFill>
-                <a:latin typeface="Arial" pitchFamily="34" charset="0"/>
-                <a:ea typeface="Arial" pitchFamily="34" charset="-122"/>
-                <a:cs typeface="Arial" pitchFamily="34" charset="-120"/>
-              </a:rPr>
-              <a:t>תקופת הזכאות</a:t>
-            </a:r>
-            <a:endParaRPr lang="en-US" sz="1650" dirty="0"/>
-          </a:p>
-        </p:txBody>
-      </p:sp>
-      <p:sp>
-        <p:nvSpPr>
-          <p:cNvPr id="14" name="Text 11"/>
-          <p:cNvSpPr txBox="1"/>
-          <p:nvPr/>
-        </p:nvSpPr>
-        <p:spPr>
-          <a:xfrm>
-            <a:off x="960120" y="3264408"/>
-            <a:ext cx="3291840" cy="658368"/>
-          </a:xfrm>
-          <a:prstGeom prst="rect">
-            <a:avLst/>
-          </a:prstGeom>
-          <a:noFill/>
-          <a:ln/>
-        </p:spPr>
-        <p:txBody>
-          <a:bodyPr wrap="square" rtlCol="0" anchor="ctr"/>
-          <a:lstStyle/>
-          <a:p>
-            <a:pPr rtl="1" algn="r" indent="0" marL="0">
-              <a:buNone/>
-            </a:pPr>
-            <a:r>
-              <a:rPr lang="en-US" sz="1450" dirty="0">
-                <a:solidFill>
-                  <a:srgbClr val="64796C"/>
-                </a:solidFill>
-                <a:latin typeface="Arial" pitchFamily="34" charset="0"/>
-                <a:ea typeface="Arial" pitchFamily="34" charset="-122"/>
-                <a:cs typeface="Arial" pitchFamily="34" charset="-120"/>
-              </a:rPr>
-              <a:t>מאיזה תאריך ההטבה בתוקף</a:t>
-            </a:r>
-            <a:endParaRPr lang="en-US" sz="1450" dirty="0"/>
-          </a:p>
-        </p:txBody>
-      </p:sp>
-      <p:sp>
-        <p:nvSpPr>
-          <p:cNvPr id="15" name="Shape 12"/>
-          <p:cNvSpPr/>
-          <p:nvPr/>
-        </p:nvSpPr>
-        <p:spPr>
-          <a:xfrm>
-            <a:off x="685800" y="4050792"/>
-            <a:ext cx="6309360" cy="658368"/>
-          </a:xfrm>
-          <a:prstGeom prst="roundRect">
-            <a:avLst>
-              <a:gd name="adj" fmla="val 16667"/>
-            </a:avLst>
-          </a:prstGeom>
-          <a:solidFill>
-            <a:srgbClr val="FFFFFF"/>
-          </a:solidFill>
-          <a:ln w="12700">
-            <a:solidFill>
-              <a:srgbClr val="CFE0D5"/>
-            </a:solidFill>
-            <a:prstDash val="solid"/>
-          </a:ln>
-        </p:spPr>
-      </p:sp>
-      <p:sp>
-        <p:nvSpPr>
-          <p:cNvPr id="16" name="Text 13"/>
-          <p:cNvSpPr txBox="1"/>
-          <p:nvPr/>
-        </p:nvSpPr>
-        <p:spPr>
-          <a:xfrm>
-            <a:off x="4160520" y="4050792"/>
-            <a:ext cx="2743200" cy="658368"/>
-          </a:xfrm>
-          <a:prstGeom prst="rect">
-            <a:avLst/>
-          </a:prstGeom>
-          <a:noFill/>
-          <a:ln/>
-        </p:spPr>
-        <p:txBody>
-          <a:bodyPr wrap="square" rtlCol="0" anchor="ctr"/>
-          <a:lstStyle/>
-          <a:p>
-            <a:pPr rtl="1" algn="r" indent="0" marL="0">
-              <a:buNone/>
-            </a:pPr>
-            <a:r>
-              <a:rPr lang="en-US" sz="1650" b="1" dirty="0">
-                <a:solidFill>
-                  <a:srgbClr val="14477E"/>
-                </a:solidFill>
-                <a:latin typeface="Arial" pitchFamily="34" charset="0"/>
-                <a:ea typeface="Arial" pitchFamily="34" charset="-122"/>
-                <a:cs typeface="Arial" pitchFamily="34" charset="-120"/>
-              </a:rPr>
-              <a:t>סוג התשלום</a:t>
-            </a:r>
-            <a:endParaRPr lang="en-US" sz="1650" dirty="0"/>
-          </a:p>
-        </p:txBody>
-      </p:sp>
-      <p:sp>
-        <p:nvSpPr>
-          <p:cNvPr id="17" name="Text 14"/>
-          <p:cNvSpPr txBox="1"/>
-          <p:nvPr/>
-        </p:nvSpPr>
-        <p:spPr>
-          <a:xfrm>
-            <a:off x="960120" y="4050792"/>
-            <a:ext cx="3291840" cy="658368"/>
-          </a:xfrm>
-          <a:prstGeom prst="rect">
-            <a:avLst/>
-          </a:prstGeom>
-          <a:noFill/>
-          <a:ln/>
-        </p:spPr>
-        <p:txBody>
-          <a:bodyPr wrap="square" rtlCol="0" anchor="ctr"/>
-          <a:lstStyle/>
-          <a:p>
-            <a:pPr rtl="1" algn="r" indent="0" marL="0">
-              <a:buNone/>
-            </a:pPr>
-            <a:r>
-              <a:rPr lang="en-US" sz="1450" dirty="0">
-                <a:solidFill>
-                  <a:srgbClr val="64796C"/>
-                </a:solidFill>
-                <a:latin typeface="Arial" pitchFamily="34" charset="0"/>
-                <a:ea typeface="Arial" pitchFamily="34" charset="-122"/>
-                <a:cs typeface="Arial" pitchFamily="34" charset="-120"/>
-              </a:rPr>
-              <a:t>חודשי · שנתי · חד-פעמי · הכפוף להחזר הוצאות</a:t>
-            </a:r>
-            <a:endParaRPr lang="en-US" sz="1450" dirty="0"/>
-          </a:p>
-        </p:txBody>
-      </p:sp>
-      <p:sp>
-        <p:nvSpPr>
-          <p:cNvPr id="18" name="Shape 15"/>
-          <p:cNvSpPr/>
-          <p:nvPr/>
-        </p:nvSpPr>
-        <p:spPr>
-          <a:xfrm>
-            <a:off x="685800" y="4837176"/>
-            <a:ext cx="6309360" cy="658368"/>
-          </a:xfrm>
-          <a:prstGeom prst="roundRect">
-            <a:avLst>
-              <a:gd name="adj" fmla="val 16667"/>
-            </a:avLst>
-          </a:prstGeom>
-          <a:solidFill>
-            <a:srgbClr val="FFFFFF"/>
-          </a:solidFill>
-          <a:ln w="12700">
-            <a:solidFill>
-              <a:srgbClr val="CFE0D5"/>
-            </a:solidFill>
-            <a:prstDash val="solid"/>
-          </a:ln>
-        </p:spPr>
-      </p:sp>
-      <p:sp>
-        <p:nvSpPr>
-          <p:cNvPr id="19" name="Text 16"/>
-          <p:cNvSpPr txBox="1"/>
-          <p:nvPr/>
-        </p:nvSpPr>
-        <p:spPr>
-          <a:xfrm>
-            <a:off x="4160520" y="4837176"/>
-            <a:ext cx="2743200" cy="658368"/>
-          </a:xfrm>
-          <a:prstGeom prst="rect">
-            <a:avLst/>
-          </a:prstGeom>
-          <a:noFill/>
-          <a:ln/>
-        </p:spPr>
-        <p:txBody>
-          <a:bodyPr wrap="square" rtlCol="0" anchor="ctr"/>
-          <a:lstStyle/>
-          <a:p>
-            <a:pPr rtl="1" algn="r" indent="0" marL="0">
-              <a:buNone/>
-            </a:pPr>
-            <a:r>
-              <a:rPr lang="en-US" sz="1650" b="1" dirty="0">
-                <a:solidFill>
-                  <a:srgbClr val="14477E"/>
-                </a:solidFill>
-                <a:latin typeface="Arial" pitchFamily="34" charset="0"/>
-                <a:ea typeface="Arial" pitchFamily="34" charset="-122"/>
-                <a:cs typeface="Arial" pitchFamily="34" charset="-120"/>
-              </a:rPr>
-              <a:t>היתרה למימוש</a:t>
-            </a:r>
-            <a:endParaRPr lang="en-US" sz="1650" dirty="0"/>
-          </a:p>
-        </p:txBody>
-      </p:sp>
-      <p:sp>
-        <p:nvSpPr>
-          <p:cNvPr id="20" name="Text 17"/>
-          <p:cNvSpPr txBox="1"/>
-          <p:nvPr/>
-        </p:nvSpPr>
-        <p:spPr>
-          <a:xfrm>
-            <a:off x="960120" y="4837176"/>
-            <a:ext cx="3291840" cy="658368"/>
-          </a:xfrm>
-          <a:prstGeom prst="rect">
-            <a:avLst/>
-          </a:prstGeom>
-          <a:noFill/>
-          <a:ln/>
-        </p:spPr>
-        <p:txBody>
-          <a:bodyPr wrap="square" rtlCol="0" anchor="ctr"/>
-          <a:lstStyle/>
-          <a:p>
-            <a:pPr rtl="1" algn="r" indent="0" marL="0">
-              <a:buNone/>
-            </a:pPr>
-            <a:r>
-              <a:rPr lang="en-US" sz="1450" dirty="0">
-                <a:solidFill>
-                  <a:srgbClr val="64796C"/>
-                </a:solidFill>
-                <a:latin typeface="Arial" pitchFamily="34" charset="0"/>
-                <a:ea typeface="Arial" pitchFamily="34" charset="-122"/>
-                <a:cs typeface="Arial" pitchFamily="34" charset="-120"/>
-              </a:rPr>
-              <a:t>כמה נותר, בגרף</a:t>
-            </a:r>
-            <a:endParaRPr lang="en-US" sz="1450" dirty="0"/>
-          </a:p>
-        </p:txBody>
-      </p:sp>
-      <p:sp>
-        <p:nvSpPr>
-          <p:cNvPr id="21" name="Shape 18"/>
-          <p:cNvSpPr/>
-          <p:nvPr/>
-        </p:nvSpPr>
-        <p:spPr>
-          <a:xfrm>
-            <a:off x="685800" y="5623560"/>
-            <a:ext cx="6309360" cy="658368"/>
-          </a:xfrm>
-          <a:prstGeom prst="roundRect">
-            <a:avLst>
-              <a:gd name="adj" fmla="val 16667"/>
+              <a:gd name="adj" fmla="val 24000"/>
             </a:avLst>
           </a:prstGeom>
           <a:solidFill>
             <a:srgbClr val="FBEFE6"/>
           </a:solidFill>
-          <a:ln w="19050">
+          <a:ln w="17780">
             <a:solidFill>
               <a:srgbClr val="B85C22"/>
             </a:solidFill>
@@ -10185,14 +9951,14 @@
       </p:sp>
       <p:sp>
         <p:nvSpPr>
-          <p:cNvPr id="22" name="Text 19"/>
-          <p:cNvSpPr txBox="1"/>
-          <p:nvPr/>
-        </p:nvSpPr>
-        <p:spPr>
-          <a:xfrm>
-            <a:off x="685800" y="5623560"/>
-            <a:ext cx="6309360" cy="658368"/>
+          <p:cNvPr id="24" name="Text 20"/>
+          <p:cNvSpPr txBox="1"/>
+          <p:nvPr/>
+        </p:nvSpPr>
+        <p:spPr>
+          <a:xfrm>
+            <a:off x="685800" y="5870448"/>
+            <a:ext cx="10817352" cy="457200"/>
           </a:xfrm>
           <a:prstGeom prst="rect">
             <a:avLst/>
@@ -10208,7 +9974,7 @@
               <a:buNone/>
             </a:pPr>
             <a:r>
-              <a:rPr lang="en-US" sz="1700" b="1" dirty="0">
+              <a:rPr lang="en-US" sz="1600" b="1" dirty="0">
                 <a:solidFill>
                   <a:srgbClr val="B85C22"/>
                 </a:solidFill>
@@ -10216,36 +9982,12 @@
                 <a:ea typeface="Arial" pitchFamily="34" charset="-122"/>
                 <a:cs typeface="Arial" pitchFamily="34" charset="-120"/>
               </a:rPr>
-              <a:t>מוצגות תכניות מהשנתיים האחרונות בלבד.</a:t>
-            </a:r>
-            <a:endParaRPr lang="en-US" sz="1700" dirty="0"/>
-          </a:p>
-        </p:txBody>
-      </p:sp>
-      <p:pic>
-        <p:nvPicPr>
-          <p:cNvPr id="23" name="Image 1" descr="/home/user/mazpen-m.r/build/deck/assets/benefit.png">    </p:cNvPr>
-          <p:cNvPicPr>
-            <a:picLocks noChangeAspect="1"/>
-          </p:cNvPicPr>
-          <p:nvPr/>
-        </p:nvPicPr>
-        <p:blipFill>
-          <a:blip r:embed="rId2"/>
-          <a:stretch>
-            <a:fillRect/>
-          </a:stretch>
-        </p:blipFill>
-        <p:spPr>
-          <a:xfrm>
-            <a:off x="7315200" y="2654089"/>
-            <a:ext cx="4187952" cy="2647102"/>
-          </a:xfrm>
-          <a:prstGeom prst="rect">
-            <a:avLst/>
-          </a:prstGeom>
-        </p:spPr>
-      </p:pic>
+              <a:t>ב"ההטבות שלי" מוצגות תכניות מהשנתיים האחרונות בלבד.</a:t>
+            </a:r>
+            <a:endParaRPr lang="en-US" sz="1600" dirty="0"/>
+          </a:p>
+        </p:txBody>
+      </p:sp>
     </p:spTree>
   </p:cSld>
   <p:clrMapOvr>
@@ -10367,7 +10109,7 @@
                 <a:ea typeface="Arial" pitchFamily="34" charset="-122"/>
                 <a:cs typeface="Arial" pitchFamily="34" charset="-120"/>
               </a:rPr>
-              <a:t>זו השפה שהמבוטח רואה — ולכן זו השפה שבה נדבר איתו</a:t>
+              <a:t>זו השפה שהמבוטח רואה, ולכן זו השפה שבה נדבר איתו</a:t>
             </a:r>
             <a:endParaRPr lang="en-US" sz="1550" dirty="0"/>
           </a:p>
@@ -10420,7 +10162,7 @@
         </p:nvSpPr>
         <p:spPr>
           <a:xfrm>
-            <a:off x="1833372" y="2414016"/>
+            <a:off x="1833372" y="1837944"/>
             <a:ext cx="8503920" cy="18288"/>
           </a:xfrm>
           <a:prstGeom prst="rect">
@@ -10440,7 +10182,7 @@
         </p:nvSpPr>
         <p:spPr>
           <a:xfrm>
-            <a:off x="9171432" y="2148840"/>
+            <a:off x="9171432" y="1572768"/>
             <a:ext cx="2331720" cy="548640"/>
           </a:xfrm>
           <a:prstGeom prst="roundRect">
@@ -10467,7 +10209,7 @@
         </p:nvSpPr>
         <p:spPr>
           <a:xfrm>
-            <a:off x="11045952" y="2331720"/>
+            <a:off x="11045952" y="1755648"/>
             <a:ext cx="182880" cy="182880"/>
           </a:xfrm>
           <a:prstGeom prst="ellipse">
@@ -10487,7 +10229,7 @@
         </p:nvSpPr>
         <p:spPr>
           <a:xfrm>
-            <a:off x="9336024" y="2148840"/>
+            <a:off x="9336024" y="1572768"/>
             <a:ext cx="1673352" cy="548640"/>
           </a:xfrm>
           <a:prstGeom prst="rect">
@@ -10526,8 +10268,8 @@
         </p:nvSpPr>
         <p:spPr>
           <a:xfrm>
-            <a:off x="9171432" y="2898648"/>
-            <a:ext cx="2331720" cy="1005840"/>
+            <a:off x="9171432" y="2286000"/>
+            <a:ext cx="2331720" cy="777240"/>
           </a:xfrm>
           <a:prstGeom prst="rect">
             <a:avLst/>
@@ -10543,7 +10285,7 @@
               <a:buNone/>
             </a:pPr>
             <a:r>
-              <a:rPr lang="en-US" sz="1350" dirty="0">
+              <a:rPr lang="en-US" sz="1300" dirty="0">
                 <a:solidFill>
                   <a:srgbClr val="64796C"/>
                 </a:solidFill>
@@ -10553,7 +10295,7 @@
               </a:rPr>
               <a:t>טרם הוגשה ותיתכן בה זכאות. אפשר להגיש דרך האתר האישי.</a:t>
             </a:r>
-            <a:endParaRPr lang="en-US" sz="1350" dirty="0"/>
+            <a:endParaRPr lang="en-US" sz="1300" dirty="0"/>
           </a:p>
         </p:txBody>
       </p:sp>
@@ -10565,7 +10307,7 @@
         </p:nvSpPr>
         <p:spPr>
           <a:xfrm>
-            <a:off x="8759952" y="2322576"/>
+            <a:off x="8759952" y="1746504"/>
             <a:ext cx="310896" cy="201168"/>
           </a:xfrm>
           <a:prstGeom prst="leftArrow">
@@ -10585,7 +10327,7 @@
         </p:nvSpPr>
         <p:spPr>
           <a:xfrm>
-            <a:off x="6336792" y="2148840"/>
+            <a:off x="6336792" y="1572768"/>
             <a:ext cx="2331720" cy="548640"/>
           </a:xfrm>
           <a:prstGeom prst="roundRect">
@@ -10612,7 +10354,7 @@
         </p:nvSpPr>
         <p:spPr>
           <a:xfrm>
-            <a:off x="8211312" y="2331720"/>
+            <a:off x="8211312" y="1755648"/>
             <a:ext cx="182880" cy="182880"/>
           </a:xfrm>
           <a:prstGeom prst="ellipse">
@@ -10632,7 +10374,7 @@
         </p:nvSpPr>
         <p:spPr>
           <a:xfrm>
-            <a:off x="6501384" y="2148840"/>
+            <a:off x="6501384" y="1572768"/>
             <a:ext cx="1673352" cy="548640"/>
           </a:xfrm>
           <a:prstGeom prst="rect">
@@ -10671,8 +10413,8 @@
         </p:nvSpPr>
         <p:spPr>
           <a:xfrm>
-            <a:off x="6336792" y="2898648"/>
-            <a:ext cx="2331720" cy="1005840"/>
+            <a:off x="6336792" y="2286000"/>
+            <a:ext cx="2331720" cy="777240"/>
           </a:xfrm>
           <a:prstGeom prst="rect">
             <a:avLst/>
@@ -10688,7 +10430,7 @@
               <a:buNone/>
             </a:pPr>
             <a:r>
-              <a:rPr lang="en-US" sz="1350" dirty="0">
+              <a:rPr lang="en-US" sz="1300" dirty="0">
                 <a:solidFill>
                   <a:srgbClr val="64796C"/>
                 </a:solidFill>
@@ -10698,7 +10440,7 @@
               </a:rPr>
               <a:t>הוגשה וטרם התקבלה בה החלטה.</a:t>
             </a:r>
-            <a:endParaRPr lang="en-US" sz="1350" dirty="0"/>
+            <a:endParaRPr lang="en-US" sz="1300" dirty="0"/>
           </a:p>
         </p:txBody>
       </p:sp>
@@ -10710,7 +10452,7 @@
         </p:nvSpPr>
         <p:spPr>
           <a:xfrm>
-            <a:off x="5925312" y="2322576"/>
+            <a:off x="5925312" y="1746504"/>
             <a:ext cx="310896" cy="201168"/>
           </a:xfrm>
           <a:prstGeom prst="leftArrow">
@@ -10730,7 +10472,7 @@
         </p:nvSpPr>
         <p:spPr>
           <a:xfrm>
-            <a:off x="3502152" y="2148840"/>
+            <a:off x="3502152" y="1572768"/>
             <a:ext cx="2331720" cy="548640"/>
           </a:xfrm>
           <a:prstGeom prst="roundRect">
@@ -10757,7 +10499,7 @@
         </p:nvSpPr>
         <p:spPr>
           <a:xfrm>
-            <a:off x="5376672" y="2331720"/>
+            <a:off x="5376672" y="1755648"/>
             <a:ext cx="182880" cy="182880"/>
           </a:xfrm>
           <a:prstGeom prst="ellipse">
@@ -10777,7 +10519,7 @@
         </p:nvSpPr>
         <p:spPr>
           <a:xfrm>
-            <a:off x="3666744" y="2148840"/>
+            <a:off x="3666744" y="1572768"/>
             <a:ext cx="1673352" cy="548640"/>
           </a:xfrm>
           <a:prstGeom prst="rect">
@@ -10816,8 +10558,8 @@
         </p:nvSpPr>
         <p:spPr>
           <a:xfrm>
-            <a:off x="3502152" y="2898648"/>
-            <a:ext cx="2331720" cy="1005840"/>
+            <a:off x="3502152" y="2286000"/>
+            <a:ext cx="2331720" cy="777240"/>
           </a:xfrm>
           <a:prstGeom prst="rect">
             <a:avLst/>
@@ -10833,7 +10575,7 @@
               <a:buNone/>
             </a:pPr>
             <a:r>
-              <a:rPr lang="en-US" sz="1350" dirty="0">
+              <a:rPr lang="en-US" sz="1300" dirty="0">
                 <a:solidFill>
                   <a:srgbClr val="64796C"/>
                 </a:solidFill>
@@ -10843,7 +10585,7 @@
               </a:rPr>
               <a:t>אושרה, ויש בה יתרה. אפשר להגיש בה קבלות להחזר.</a:t>
             </a:r>
-            <a:endParaRPr lang="en-US" sz="1350" dirty="0"/>
+            <a:endParaRPr lang="en-US" sz="1300" dirty="0"/>
           </a:p>
         </p:txBody>
       </p:sp>
@@ -10855,7 +10597,7 @@
         </p:nvSpPr>
         <p:spPr>
           <a:xfrm>
-            <a:off x="3090672" y="2322576"/>
+            <a:off x="3090672" y="1746504"/>
             <a:ext cx="310896" cy="201168"/>
           </a:xfrm>
           <a:prstGeom prst="leftArrow">
@@ -10875,7 +10617,7 @@
         </p:nvSpPr>
         <p:spPr>
           <a:xfrm>
-            <a:off x="667512" y="2148840"/>
+            <a:off x="667512" y="1572768"/>
             <a:ext cx="2331720" cy="548640"/>
           </a:xfrm>
           <a:prstGeom prst="roundRect">
@@ -10902,7 +10644,7 @@
         </p:nvSpPr>
         <p:spPr>
           <a:xfrm>
-            <a:off x="2542032" y="2331720"/>
+            <a:off x="2542032" y="1755648"/>
             <a:ext cx="182880" cy="182880"/>
           </a:xfrm>
           <a:prstGeom prst="ellipse">
@@ -10922,7 +10664,7 @@
         </p:nvSpPr>
         <p:spPr>
           <a:xfrm>
-            <a:off x="832104" y="2148840"/>
+            <a:off x="832104" y="1572768"/>
             <a:ext cx="1673352" cy="548640"/>
           </a:xfrm>
           <a:prstGeom prst="rect">
@@ -10961,8 +10703,8 @@
         </p:nvSpPr>
         <p:spPr>
           <a:xfrm>
-            <a:off x="667512" y="2898648"/>
-            <a:ext cx="2331720" cy="1005840"/>
+            <a:off x="667512" y="2286000"/>
+            <a:ext cx="2331720" cy="777240"/>
           </a:xfrm>
           <a:prstGeom prst="rect">
             <a:avLst/>
@@ -10978,7 +10720,7 @@
               <a:buNone/>
             </a:pPr>
             <a:r>
-              <a:rPr lang="en-US" sz="1350" dirty="0">
+              <a:rPr lang="en-US" sz="1300" dirty="0">
                 <a:solidFill>
                   <a:srgbClr val="64796C"/>
                 </a:solidFill>
@@ -10988,7 +10730,7 @@
               </a:rPr>
               <a:t>לא נותרה בה יתרה, ולא ניתן להגיש בה קבלות נוספות.</a:t>
             </a:r>
-            <a:endParaRPr lang="en-US" sz="1350" dirty="0"/>
+            <a:endParaRPr lang="en-US" sz="1300" dirty="0"/>
           </a:p>
         </p:txBody>
       </p:sp>
@@ -11000,8 +10742,8 @@
         </p:nvSpPr>
         <p:spPr>
           <a:xfrm>
-            <a:off x="7488936" y="3977640"/>
-            <a:ext cx="27432" cy="566928"/>
+            <a:off x="7488936" y="3054096"/>
+            <a:ext cx="27432" cy="320040"/>
           </a:xfrm>
           <a:prstGeom prst="rect">
             <a:avLst/>
@@ -11020,7 +10762,7 @@
         </p:nvSpPr>
         <p:spPr>
           <a:xfrm>
-            <a:off x="6336792" y="4544568"/>
+            <a:off x="6336792" y="3374136"/>
             <a:ext cx="2331720" cy="548640"/>
           </a:xfrm>
           <a:prstGeom prst="roundRect">
@@ -11047,7 +10789,7 @@
         </p:nvSpPr>
         <p:spPr>
           <a:xfrm>
-            <a:off x="8211312" y="4727448"/>
+            <a:off x="8211312" y="3557016"/>
             <a:ext cx="182880" cy="182880"/>
           </a:xfrm>
           <a:prstGeom prst="ellipse">
@@ -11067,7 +10809,7 @@
         </p:nvSpPr>
         <p:spPr>
           <a:xfrm>
-            <a:off x="6501384" y="4544568"/>
+            <a:off x="6501384" y="3374136"/>
             <a:ext cx="1673352" cy="548640"/>
           </a:xfrm>
           <a:prstGeom prst="rect">
@@ -11106,8 +10848,8 @@
         </p:nvSpPr>
         <p:spPr>
           <a:xfrm>
-            <a:off x="3273552" y="4581144"/>
-            <a:ext cx="2880360" cy="640080"/>
+            <a:off x="3273552" y="3419856"/>
+            <a:ext cx="2880360" cy="566928"/>
           </a:xfrm>
           <a:prstGeom prst="rect">
             <a:avLst/>
@@ -11131,7 +10873,7 @@
                 <a:ea typeface="Arial" pitchFamily="34" charset="-122"/>
                 <a:cs typeface="Arial" pitchFamily="34" charset="-120"/>
               </a:rPr>
-              <a:t>הבקשה נדחתה, וסיבת הדחייה מאישור ההחלטה מופיעה כאן — המבוטח קורא אותה.</a:t>
+              <a:t>סיבת הדחייה מאישור ההחלטה מופיעה כאן, והמבוטח קורא אותה.</a:t>
             </a:r>
             <a:endParaRPr lang="en-US" sz="1350" dirty="0"/>
           </a:p>
@@ -11139,50 +10881,23 @@
       </p:sp>
       <p:sp>
         <p:nvSpPr>
-          <p:cNvPr id="31" name="Shape 28"/>
-          <p:cNvSpPr/>
-          <p:nvPr/>
-        </p:nvSpPr>
-        <p:spPr>
-          <a:xfrm>
-            <a:off x="9171432" y="4343400"/>
-            <a:ext cx="2331720" cy="960120"/>
-          </a:xfrm>
-          <a:prstGeom prst="roundRect">
-            <a:avLst>
-              <a:gd name="adj" fmla="val 11429"/>
-            </a:avLst>
-          </a:prstGeom>
-          <a:solidFill>
-            <a:srgbClr val="E9F3ED"/>
-          </a:solidFill>
-          <a:ln w="17780">
-            <a:solidFill>
-              <a:srgbClr val="2C7A5B"/>
-            </a:solidFill>
-            <a:prstDash val="solid"/>
-          </a:ln>
-        </p:spPr>
-      </p:sp>
-      <p:sp>
-        <p:nvSpPr>
-          <p:cNvPr id="32" name="Text 29"/>
-          <p:cNvSpPr txBox="1"/>
-          <p:nvPr/>
-        </p:nvSpPr>
-        <p:spPr>
-          <a:xfrm>
-            <a:off x="9281160" y="4343400"/>
-            <a:ext cx="2112264" cy="960120"/>
-          </a:xfrm>
-          <a:prstGeom prst="rect">
-            <a:avLst/>
-          </a:prstGeom>
-          <a:noFill/>
-          <a:ln/>
-        </p:spPr>
-        <p:txBody>
-          <a:bodyPr wrap="square" lIns="0" tIns="0" rIns="0" bIns="0" rtlCol="0" anchor="ctr"/>
+          <p:cNvPr id="31" name="Text 28"/>
+          <p:cNvSpPr txBox="1"/>
+          <p:nvPr/>
+        </p:nvSpPr>
+        <p:spPr>
+          <a:xfrm>
+            <a:off x="685800" y="4069080"/>
+            <a:ext cx="10817352" cy="365760"/>
+          </a:xfrm>
+          <a:prstGeom prst="rect">
+            <a:avLst/>
+          </a:prstGeom>
+          <a:noFill/>
+          <a:ln/>
+        </p:spPr>
+        <p:txBody>
+          <a:bodyPr wrap="square" rtlCol="0" anchor="ctr"/>
           <a:lstStyle/>
           <a:p>
             <a:pPr rtl="1" algn="ctr" indent="0" marL="0">
@@ -11191,18 +10906,42 @@
             <a:r>
               <a:rPr lang="en-US" sz="1500" b="1" dirty="0">
                 <a:solidFill>
-                  <a:srgbClr val="1F6E43"/>
-                </a:solidFill>
-                <a:latin typeface="Arial" pitchFamily="34" charset="0"/>
-                <a:ea typeface="Arial" pitchFamily="34" charset="-122"/>
-                <a:cs typeface="Arial" pitchFamily="34" charset="-120"/>
-              </a:rPr>
-              <a:t>הסטטוס גלוי למבוטח בכל רגע.</a:t>
+                  <a:srgbClr val="14477E"/>
+                </a:solidFill>
+                <a:latin typeface="Arial" pitchFamily="34" charset="0"/>
+                <a:ea typeface="Arial" pitchFamily="34" charset="-122"/>
+                <a:cs typeface="Arial" pitchFamily="34" charset="-120"/>
+              </a:rPr>
+              <a:t>וכך זה נראה במסך: הסטטוס פותח כל שורה של הטבה, בעמוד שנפתח מ"ההטבות שלי".</a:t>
             </a:r>
             <a:endParaRPr lang="en-US" sz="1500" dirty="0"/>
           </a:p>
         </p:txBody>
       </p:sp>
+      <p:pic>
+        <p:nvPicPr>
+          <p:cNvPr id="32" name="Image 1" descr="/home/user/mazpen-m.r/build/deck/assets/status_rows.png">    </p:cNvPr>
+          <p:cNvPicPr>
+            <a:picLocks noChangeAspect="1"/>
+          </p:cNvPicPr>
+          <p:nvPr/>
+        </p:nvPicPr>
+        <p:blipFill>
+          <a:blip r:embed="rId2"/>
+          <a:stretch>
+            <a:fillRect/>
+          </a:stretch>
+        </p:blipFill>
+        <p:spPr>
+          <a:xfrm>
+            <a:off x="3180017" y="4480560"/>
+            <a:ext cx="5828918" cy="1828800"/>
+          </a:xfrm>
+          <a:prstGeom prst="rect">
+            <a:avLst/>
+          </a:prstGeom>
+        </p:spPr>
+      </p:pic>
     </p:spTree>
   </p:cSld>
   <p:clrMapOvr>
@@ -11285,7 +11024,7 @@
                 <a:ea typeface="Arial" pitchFamily="34" charset="-122"/>
                 <a:cs typeface="Arial" pitchFamily="34" charset="-120"/>
               </a:rPr>
-              <a:t>"פרטים נוספים" — התמונה המלאה של התכנית</a:t>
+              <a:t>"פרטים נוספים": התמונה המלאה של התכנית</a:t>
             </a:r>
             <a:endParaRPr lang="en-US" sz="3300" dirty="0"/>
           </a:p>
@@ -11324,7 +11063,7 @@
                 <a:ea typeface="Arial" pitchFamily="34" charset="-122"/>
                 <a:cs typeface="Arial" pitchFamily="34" charset="-120"/>
               </a:rPr>
-              <a:t>שלושה אזורים, וזה מה שהוא רואה בכל אחד</a:t>
+              <a:t>רמה שנייה: לחיצה שנייה, מתוך שורת ההטבה, פותחת את כל מה שיש בתכנית אחת</a:t>
             </a:r>
             <a:endParaRPr lang="en-US" sz="1550" dirty="0"/>
           </a:p>
@@ -11827,8 +11566,8 @@
         </p:nvSpPr>
         <p:spPr>
           <a:xfrm>
-            <a:off x="685800" y="5532120"/>
-            <a:ext cx="4892040" cy="457200"/>
+            <a:off x="685800" y="5440680"/>
+            <a:ext cx="4892040" cy="822960"/>
           </a:xfrm>
           <a:prstGeom prst="rect">
             <a:avLst/>
@@ -11852,7 +11591,7 @@
                 <a:ea typeface="Arial" pitchFamily="34" charset="-122"/>
                 <a:cs typeface="Arial" pitchFamily="34" charset="-120"/>
               </a:rPr>
-              <a:t>בתכנית פעילה מופיע גם הכפתור להגשת חשבונית או קבלה חדשה.</a:t>
+              <a:t>כאן, ורק כאן, מופיעים סיכום המימוש והיתרה שנותרה. ברשימה עצמה הם אינם מוצגים.</a:t>
             </a:r>
             <a:endParaRPr lang="en-US" sz="1500" dirty="0"/>
           </a:p>
@@ -11979,7 +11718,7 @@
                 <a:ea typeface="Arial" pitchFamily="34" charset="-122"/>
                 <a:cs typeface="Arial" pitchFamily="34" charset="-120"/>
               </a:rPr>
-              <a:t>לפי הפרופיל האישי — ומה קורה כשהוא לוחץ</a:t>
+              <a:t>לפי הפרופיל האישי, ומה קורה כשהוא לוחץ</a:t>
             </a:r>
             <a:endParaRPr lang="en-US" sz="1550" dirty="0"/>
           </a:p>
@@ -12026,57 +11765,123 @@
       </p:sp>
       <p:sp>
         <p:nvSpPr>
-          <p:cNvPr id="6" name="Text 3"/>
-          <p:cNvSpPr txBox="1"/>
-          <p:nvPr/>
-        </p:nvSpPr>
-        <p:spPr>
-          <a:xfrm>
-            <a:off x="685800" y="1645920"/>
-            <a:ext cx="10817352" cy="822960"/>
-          </a:xfrm>
-          <a:prstGeom prst="rect">
-            <a:avLst/>
-          </a:prstGeom>
-          <a:noFill/>
-          <a:ln/>
-        </p:spPr>
-        <p:txBody>
-          <a:bodyPr wrap="square" rtlCol="0" anchor="t"/>
-          <a:lstStyle/>
-          <a:p>
-            <a:pPr rtl="1" algn="r" indent="0" marL="0">
-              <a:buNone/>
-            </a:pPr>
-            <a:r>
-              <a:rPr lang="en-US" sz="1700" dirty="0">
-                <a:solidFill>
-                  <a:srgbClr val="1E2C24"/>
-                </a:solidFill>
-                <a:latin typeface="Arial" pitchFamily="34" charset="0"/>
-                <a:ea typeface="Arial" pitchFamily="34" charset="-122"/>
-                <a:cs typeface="Arial" pitchFamily="34" charset="-120"/>
-              </a:rPr>
-              <a:t>מוצג מגוון הטבות שייתכן שהמבוטח זכאי להן, אך הוא עדיין לא בדק את זכאותו ולא ביקש אותן בעבר. הוא יכול להיכנס לכל אחת מהן ולהגיש בקשה לבדיקת זכאות — בשתי דרכים:</a:t>
-            </a:r>
-            <a:endParaRPr lang="en-US" sz="1700" dirty="0"/>
-          </a:p>
-        </p:txBody>
-      </p:sp>
-      <p:sp>
-        <p:nvSpPr>
-          <p:cNvPr id="7" name="Shape 4"/>
+          <p:cNvPr id="6" name="Shape 3"/>
           <p:cNvSpPr/>
           <p:nvPr/>
         </p:nvSpPr>
         <p:spPr>
           <a:xfrm>
-            <a:off x="6368796" y="2697480"/>
-            <a:ext cx="5134356" cy="2103120"/>
+            <a:off x="685800" y="1600200"/>
+            <a:ext cx="10817352" cy="868680"/>
           </a:xfrm>
           <a:prstGeom prst="roundRect">
             <a:avLst>
-              <a:gd name="adj" fmla="val 5217"/>
+              <a:gd name="adj" fmla="val 12632"/>
+            </a:avLst>
+          </a:prstGeom>
+          <a:solidFill>
+            <a:srgbClr val="FFFFFF"/>
+          </a:solidFill>
+          <a:ln w="12700">
+            <a:solidFill>
+              <a:srgbClr val="CFE0D5"/>
+            </a:solidFill>
+            <a:prstDash val="solid"/>
+          </a:ln>
+        </p:spPr>
+      </p:sp>
+      <p:sp>
+        <p:nvSpPr>
+          <p:cNvPr id="7" name="Text 4"/>
+          <p:cNvSpPr txBox="1"/>
+          <p:nvPr/>
+        </p:nvSpPr>
+        <p:spPr>
+          <a:xfrm>
+            <a:off x="685800" y="1600200"/>
+            <a:ext cx="10817352" cy="868680"/>
+          </a:xfrm>
+          <a:prstGeom prst="rect">
+            <a:avLst/>
+          </a:prstGeom>
+          <a:noFill/>
+          <a:ln/>
+        </p:spPr>
+        <p:txBody>
+          <a:bodyPr wrap="square" lIns="0" tIns="0" rIns="0" bIns="0" rtlCol="0" anchor="ctr"/>
+          <a:lstStyle/>
+          <a:p>
+            <a:pPr rtl="1" algn="ctr" indent="0" marL="0">
+              <a:buNone/>
+            </a:pPr>
+            <a:r>
+              <a:rPr lang="en-US" sz="1800" dirty="0">
+                <a:solidFill>
+                  <a:srgbClr val="1E2C24"/>
+                </a:solidFill>
+                <a:latin typeface="Arial" pitchFamily="34" charset="0"/>
+                <a:ea typeface="Arial" pitchFamily="34" charset="-122"/>
+                <a:cs typeface="Arial" pitchFamily="34" charset="-120"/>
+              </a:rPr>
+              <a:t>מגוון הטבות שייתכן שמגיעות לך, עם אפשרות להגיש בקשה מהירה לבדיקת הזכאות.</a:t>
+            </a:r>
+            <a:endParaRPr lang="en-US" sz="1800" dirty="0"/>
+          </a:p>
+        </p:txBody>
+      </p:sp>
+      <p:sp>
+        <p:nvSpPr>
+          <p:cNvPr id="8" name="Text 5"/>
+          <p:cNvSpPr txBox="1"/>
+          <p:nvPr/>
+        </p:nvSpPr>
+        <p:spPr>
+          <a:xfrm>
+            <a:off x="685800" y="2514600"/>
+            <a:ext cx="10817352" cy="274320"/>
+          </a:xfrm>
+          <a:prstGeom prst="rect">
+            <a:avLst/>
+          </a:prstGeom>
+          <a:noFill/>
+          <a:ln/>
+        </p:spPr>
+        <p:txBody>
+          <a:bodyPr wrap="square" rtlCol="0" anchor="ctr"/>
+          <a:lstStyle/>
+          <a:p>
+            <a:pPr rtl="1" algn="r" indent="0" marL="0">
+              <a:buNone/>
+            </a:pPr>
+            <a:r>
+              <a:rPr lang="en-US" sz="1200" dirty="0">
+                <a:solidFill>
+                  <a:srgbClr val="93A79B"/>
+                </a:solidFill>
+                <a:latin typeface="Arial" pitchFamily="34" charset="0"/>
+                <a:ea typeface="Arial" pitchFamily="34" charset="-122"/>
+                <a:cs typeface="Arial" pitchFamily="34" charset="-120"/>
+              </a:rPr>
+              <a:t>כך המצפן עצמו מסביר את האזור הזה</a:t>
+            </a:r>
+            <a:endParaRPr lang="en-US" sz="1200" dirty="0"/>
+          </a:p>
+        </p:txBody>
+      </p:sp>
+      <p:sp>
+        <p:nvSpPr>
+          <p:cNvPr id="9" name="Shape 6"/>
+          <p:cNvSpPr/>
+          <p:nvPr/>
+        </p:nvSpPr>
+        <p:spPr>
+          <a:xfrm>
+            <a:off x="6368796" y="2926080"/>
+            <a:ext cx="5134356" cy="2011680"/>
+          </a:xfrm>
+          <a:prstGeom prst="roundRect">
+            <a:avLst>
+              <a:gd name="adj" fmla="val 5455"/>
             </a:avLst>
           </a:prstGeom>
           <a:solidFill>
@@ -12092,7 +11897,7 @@
       </p:sp>
       <p:pic>
         <p:nvPicPr>
-          <p:cNvPr id="8" name="Image 1" descr="/home/user/mazpen-m.r/build/deck/assets/btn_request.png">    </p:cNvPr>
+          <p:cNvPr id="10" name="Image 1" descr="/home/user/mazpen-m.r/build/deck/assets/btn_request.png">    </p:cNvPr>
           <p:cNvPicPr>
             <a:picLocks noChangeAspect="1"/>
           </p:cNvPicPr>
@@ -12106,7 +11911,7 @@
         </p:blipFill>
         <p:spPr>
           <a:xfrm>
-            <a:off x="9612472" y="2926080"/>
+            <a:off x="9612472" y="3127248"/>
             <a:ext cx="1586799" cy="502920"/>
           </a:xfrm>
           <a:prstGeom prst="rect">
@@ -12116,13 +11921,13 @@
       </p:pic>
       <p:sp>
         <p:nvSpPr>
-          <p:cNvPr id="9" name="Text 5"/>
-          <p:cNvSpPr txBox="1"/>
-          <p:nvPr/>
-        </p:nvSpPr>
-        <p:spPr>
-          <a:xfrm>
-            <a:off x="6661404" y="3520440"/>
+          <p:cNvPr id="11" name="Text 7"/>
+          <p:cNvSpPr txBox="1"/>
+          <p:nvPr/>
+        </p:nvSpPr>
+        <p:spPr>
+          <a:xfrm>
+            <a:off x="6661404" y="3703320"/>
             <a:ext cx="4549140" cy="411480"/>
           </a:xfrm>
           <a:prstGeom prst="rect">
@@ -12155,14 +11960,14 @@
       </p:sp>
       <p:sp>
         <p:nvSpPr>
-          <p:cNvPr id="10" name="Text 6"/>
-          <p:cNvSpPr txBox="1"/>
-          <p:nvPr/>
-        </p:nvSpPr>
-        <p:spPr>
-          <a:xfrm>
-            <a:off x="6661404" y="3950208"/>
-            <a:ext cx="4549140" cy="731520"/>
+          <p:cNvPr id="12" name="Text 8"/>
+          <p:cNvSpPr txBox="1"/>
+          <p:nvPr/>
+        </p:nvSpPr>
+        <p:spPr>
+          <a:xfrm>
+            <a:off x="6661404" y="4114800"/>
+            <a:ext cx="4549140" cy="685800"/>
           </a:xfrm>
           <a:prstGeom prst="rect">
             <a:avLst/>
@@ -12194,18 +11999,18 @@
       </p:sp>
       <p:sp>
         <p:nvSpPr>
-          <p:cNvPr id="11" name="Shape 7"/>
+          <p:cNvPr id="13" name="Shape 9"/>
           <p:cNvSpPr/>
           <p:nvPr/>
         </p:nvSpPr>
         <p:spPr>
           <a:xfrm>
-            <a:off x="685800" y="2697480"/>
-            <a:ext cx="5134356" cy="2103120"/>
+            <a:off x="685800" y="2926080"/>
+            <a:ext cx="5134356" cy="2011680"/>
           </a:xfrm>
           <a:prstGeom prst="roundRect">
             <a:avLst>
-              <a:gd name="adj" fmla="val 5217"/>
+              <a:gd name="adj" fmla="val 5455"/>
             </a:avLst>
           </a:prstGeom>
           <a:solidFill>
@@ -12221,7 +12026,7 @@
       </p:sp>
       <p:pic>
         <p:nvPicPr>
-          <p:cNvPr id="12" name="Image 2" descr="/home/user/mazpen-m.r/build/deck/assets/btn_inquiry.png">    </p:cNvPr>
+          <p:cNvPr id="14" name="Image 2" descr="/home/user/mazpen-m.r/build/deck/assets/btn_inquiry.png">    </p:cNvPr>
           <p:cNvPicPr>
             <a:picLocks noChangeAspect="1"/>
           </p:cNvPicPr>
@@ -12235,7 +12040,7 @@
         </p:blipFill>
         <p:spPr>
           <a:xfrm>
-            <a:off x="3929476" y="2926080"/>
+            <a:off x="3929476" y="3127248"/>
             <a:ext cx="1586799" cy="502920"/>
           </a:xfrm>
           <a:prstGeom prst="rect">
@@ -12245,13 +12050,13 @@
       </p:pic>
       <p:sp>
         <p:nvSpPr>
-          <p:cNvPr id="13" name="Text 8"/>
-          <p:cNvSpPr txBox="1"/>
-          <p:nvPr/>
-        </p:nvSpPr>
-        <p:spPr>
-          <a:xfrm>
-            <a:off x="978408" y="3520440"/>
+          <p:cNvPr id="15" name="Text 10"/>
+          <p:cNvSpPr txBox="1"/>
+          <p:nvPr/>
+        </p:nvSpPr>
+        <p:spPr>
+          <a:xfrm>
+            <a:off x="978408" y="3703320"/>
             <a:ext cx="4549140" cy="411480"/>
           </a:xfrm>
           <a:prstGeom prst="rect">
@@ -12284,14 +12089,14 @@
       </p:sp>
       <p:sp>
         <p:nvSpPr>
-          <p:cNvPr id="14" name="Text 9"/>
-          <p:cNvSpPr txBox="1"/>
-          <p:nvPr/>
-        </p:nvSpPr>
-        <p:spPr>
-          <a:xfrm>
-            <a:off x="978408" y="3950208"/>
-            <a:ext cx="4549140" cy="731520"/>
+          <p:cNvPr id="16" name="Text 11"/>
+          <p:cNvSpPr txBox="1"/>
+          <p:nvPr/>
+        </p:nvSpPr>
+        <p:spPr>
+          <a:xfrm>
+            <a:off x="978408" y="4114800"/>
+            <a:ext cx="4549140" cy="685800"/>
           </a:xfrm>
           <a:prstGeom prst="rect">
             <a:avLst/>
@@ -12323,26 +12128,26 @@
       </p:sp>
       <p:sp>
         <p:nvSpPr>
-          <p:cNvPr id="15" name="Shape 10"/>
+          <p:cNvPr id="17" name="Shape 12"/>
           <p:cNvSpPr/>
           <p:nvPr/>
         </p:nvSpPr>
         <p:spPr>
           <a:xfrm>
-            <a:off x="685800" y="5074920"/>
-            <a:ext cx="10817352" cy="777240"/>
+            <a:off x="685800" y="5166360"/>
+            <a:ext cx="10817352" cy="1097280"/>
           </a:xfrm>
           <a:prstGeom prst="roundRect">
             <a:avLst>
-              <a:gd name="adj" fmla="val 14118"/>
+              <a:gd name="adj" fmla="val 10000"/>
             </a:avLst>
           </a:prstGeom>
           <a:solidFill>
-            <a:srgbClr val="FFFFFF"/>
+            <a:srgbClr val="FBEFE6"/>
           </a:solidFill>
-          <a:ln w="12700">
+          <a:ln w="19050">
             <a:solidFill>
-              <a:srgbClr val="CFE0D5"/>
+              <a:srgbClr val="B85C22"/>
             </a:solidFill>
             <a:prstDash val="solid"/>
           </a:ln>
@@ -12350,30 +12155,69 @@
       </p:sp>
       <p:sp>
         <p:nvSpPr>
-          <p:cNvPr id="16" name="Text 11"/>
-          <p:cNvSpPr txBox="1"/>
-          <p:nvPr/>
-        </p:nvSpPr>
-        <p:spPr>
-          <a:xfrm>
-            <a:off x="685800" y="5074920"/>
-            <a:ext cx="10817352" cy="777240"/>
-          </a:xfrm>
-          <a:prstGeom prst="rect">
-            <a:avLst/>
-          </a:prstGeom>
-          <a:noFill/>
-          <a:ln/>
-        </p:spPr>
-        <p:txBody>
-          <a:bodyPr wrap="square" lIns="0" tIns="0" rIns="0" bIns="0" rtlCol="0" anchor="ctr"/>
-          <a:lstStyle/>
-          <a:p>
-            <a:pPr rtl="1" algn="ctr" indent="0" marL="0">
-              <a:buNone/>
-            </a:pPr>
-            <a:r>
-              <a:rPr lang="en-US" sz="1650" dirty="0">
+          <p:cNvPr id="18" name="Text 13"/>
+          <p:cNvSpPr txBox="1"/>
+          <p:nvPr/>
+        </p:nvSpPr>
+        <p:spPr>
+          <a:xfrm>
+            <a:off x="1051560" y="5285232"/>
+            <a:ext cx="10085832" cy="292608"/>
+          </a:xfrm>
+          <a:prstGeom prst="rect">
+            <a:avLst/>
+          </a:prstGeom>
+          <a:noFill/>
+          <a:ln/>
+        </p:spPr>
+        <p:txBody>
+          <a:bodyPr wrap="square" rtlCol="0" anchor="ctr"/>
+          <a:lstStyle/>
+          <a:p>
+            <a:pPr rtl="1" algn="r" indent="0" marL="0">
+              <a:buNone/>
+            </a:pPr>
+            <a:r>
+              <a:rPr lang="en-US" sz="1400" b="1" dirty="0">
+                <a:solidFill>
+                  <a:srgbClr val="B85C22"/>
+                </a:solidFill>
+                <a:latin typeface="Arial" pitchFamily="34" charset="0"/>
+                <a:ea typeface="Arial" pitchFamily="34" charset="-122"/>
+                <a:cs typeface="Arial" pitchFamily="34" charset="-120"/>
+              </a:rPr>
+              <a:t>לתשומת ליבך</a:t>
+            </a:r>
+            <a:endParaRPr lang="en-US" sz="1400" dirty="0"/>
+          </a:p>
+        </p:txBody>
+      </p:sp>
+      <p:sp>
+        <p:nvSpPr>
+          <p:cNvPr id="19" name="Text 14"/>
+          <p:cNvSpPr txBox="1"/>
+          <p:nvPr/>
+        </p:nvSpPr>
+        <p:spPr>
+          <a:xfrm>
+            <a:off x="1051560" y="5577840"/>
+            <a:ext cx="10085832" cy="640080"/>
+          </a:xfrm>
+          <a:prstGeom prst="rect">
+            <a:avLst/>
+          </a:prstGeom>
+          <a:noFill/>
+          <a:ln/>
+        </p:spPr>
+        <p:txBody>
+          <a:bodyPr wrap="square" rtlCol="0" anchor="t"/>
+          <a:lstStyle/>
+          <a:p>
+            <a:pPr rtl="1" algn="r" indent="0" marL="0">
+              <a:buNone/>
+            </a:pPr>
+            <a:r>
+              <a:rPr lang="en-US" sz="1500" dirty="0">
                 <a:solidFill>
                   <a:srgbClr val="1E2C24"/>
                 </a:solidFill>
@@ -12381,9 +12225,9 @@
                 <a:ea typeface="Arial" pitchFamily="34" charset="-122"/>
                 <a:cs typeface="Arial" pitchFamily="34" charset="-120"/>
               </a:rPr>
-              <a:t>בשני המקרים הבקשה מופיעה למבוטח במצפן, והוא עוקב אחריה משם.</a:t>
-            </a:r>
-            <a:endParaRPr lang="en-US" sz="1650" dirty="0"/>
+              <a:t>לעיתים, אותה הטבה תופיע גם ב"ההטבות שלי" וגם ב"הטבות פוטנציאליות". מצב זה קורה כאשר קיימת אפשרות להרחיב את ההטבה, למשל לבקש זכאות עבור תקופה נוספת או עבור בן משפחה נוסף.</a:t>
+            </a:r>
+            <a:endParaRPr lang="en-US" sz="1500" dirty="0"/>
           </a:p>
         </p:txBody>
       </p:sp>
